--- a/output/wordlabs-usual-3day.pptx
+++ b/output/wordlabs-usual-3day.pptx
@@ -6071,7 +6071,7 @@
                 <a:ea typeface="Calibri" pitchFamily="34" charset="-122"/>
                 <a:cs typeface="Calibri" pitchFamily="34" charset="-120"/>
               </a:rPr>
-              <a:t> for the playground to be so quiet, but she </a:t>
+              <a:t> weather for spring, but she </a:t>
             </a:r>
             <a:pPr algn="l" indent="0" marL="0">
               <a:buNone/>
@@ -6102,7 +6102,7 @@
                 <a:ea typeface="Calibri" pitchFamily="34" charset="-122"/>
                 <a:cs typeface="Calibri" pitchFamily="34" charset="-120"/>
               </a:rPr>
-              <a:t> arrived early.</a:t>
+              <a:t> carried an umbrella just in case.</a:t>
             </a:r>
             <a:endParaRPr lang="en-US" sz="1800" dirty="0"/>
           </a:p>
@@ -12834,7 +12834,7 @@
                 <a:ea typeface="Calibri" pitchFamily="34" charset="-122"/>
                 <a:cs typeface="Calibri" pitchFamily="34" charset="-120"/>
               </a:rPr>
-              <a:t>in a certain way</a:t>
+              <a:t>in a way</a:t>
             </a:r>
             <a:endParaRPr lang="en-US" sz="850" dirty="0"/>
           </a:p>
@@ -13819,7 +13819,7 @@
                 <a:ea typeface="Calibri" pitchFamily="34" charset="-122"/>
                 <a:cs typeface="Calibri" pitchFamily="34" charset="-120"/>
               </a:rPr>
-              <a:t>in a certain way</a:t>
+              <a:t>in a way</a:t>
             </a:r>
             <a:endParaRPr lang="en-US" sz="850" dirty="0"/>
           </a:p>
@@ -15411,7 +15411,7 @@
                 <a:ea typeface="Calibri" pitchFamily="34" charset="-122"/>
                 <a:cs typeface="Calibri" pitchFamily="34" charset="-120"/>
               </a:rPr>
-              <a:t>in a certain way</a:t>
+              <a:t>in a way</a:t>
             </a:r>
             <a:endParaRPr lang="en-US" sz="850" dirty="0"/>
           </a:p>
@@ -15992,7 +15992,7 @@
         </p:nvSpPr>
         <p:spPr>
           <a:xfrm>
-            <a:off x="2427732" y="4169664"/>
+            <a:off x="2254649" y="4169664"/>
             <a:ext cx="685800" cy="384048"/>
           </a:xfrm>
           <a:prstGeom prst="rect">
@@ -16019,7 +16019,7 @@
         </p:nvSpPr>
         <p:spPr>
           <a:xfrm>
-            <a:off x="2427732" y="4169664"/>
+            <a:off x="2254649" y="4169664"/>
             <a:ext cx="685800" cy="384048"/>
           </a:xfrm>
           <a:prstGeom prst="rect">
@@ -16058,7 +16058,7 @@
         </p:nvSpPr>
         <p:spPr>
           <a:xfrm>
-            <a:off x="3639312" y="4169664"/>
+            <a:off x="3293146" y="4169664"/>
             <a:ext cx="685800" cy="384048"/>
           </a:xfrm>
           <a:prstGeom prst="rect">
@@ -16085,7 +16085,7 @@
         </p:nvSpPr>
         <p:spPr>
           <a:xfrm>
-            <a:off x="3639312" y="4169664"/>
+            <a:off x="3293146" y="4169664"/>
             <a:ext cx="685800" cy="384048"/>
           </a:xfrm>
           <a:prstGeom prst="rect">
@@ -16124,7 +16124,7 @@
         </p:nvSpPr>
         <p:spPr>
           <a:xfrm>
-            <a:off x="3639312" y="4572000"/>
+            <a:off x="3293146" y="4572000"/>
             <a:ext cx="685800" cy="219456"/>
           </a:xfrm>
           <a:prstGeom prst="rect">
@@ -16163,7 +16163,7 @@
         </p:nvSpPr>
         <p:spPr>
           <a:xfrm>
-            <a:off x="4850892" y="4169664"/>
+            <a:off x="4331643" y="4169664"/>
             <a:ext cx="685800" cy="384048"/>
           </a:xfrm>
           <a:prstGeom prst="rect">
@@ -16190,7 +16190,7 @@
         </p:nvSpPr>
         <p:spPr>
           <a:xfrm>
-            <a:off x="4850892" y="4169664"/>
+            <a:off x="4331643" y="4169664"/>
             <a:ext cx="685800" cy="384048"/>
           </a:xfrm>
           <a:prstGeom prst="rect">
@@ -16229,7 +16229,7 @@
         </p:nvSpPr>
         <p:spPr>
           <a:xfrm>
-            <a:off x="6062472" y="4169664"/>
+            <a:off x="5370141" y="4169664"/>
             <a:ext cx="685800" cy="384048"/>
           </a:xfrm>
           <a:prstGeom prst="rect">
@@ -16256,7 +16256,7 @@
         </p:nvSpPr>
         <p:spPr>
           <a:xfrm>
-            <a:off x="6062472" y="4169664"/>
+            <a:off x="5370141" y="4169664"/>
             <a:ext cx="685800" cy="384048"/>
           </a:xfrm>
           <a:prstGeom prst="rect">
@@ -16295,7 +16295,7 @@
         </p:nvSpPr>
         <p:spPr>
           <a:xfrm>
-            <a:off x="7274052" y="4169664"/>
+            <a:off x="6408638" y="4169664"/>
             <a:ext cx="685800" cy="384048"/>
           </a:xfrm>
           <a:prstGeom prst="rect">
@@ -16322,7 +16322,7 @@
         </p:nvSpPr>
         <p:spPr>
           <a:xfrm>
-            <a:off x="7274052" y="4169664"/>
+            <a:off x="6408638" y="4169664"/>
             <a:ext cx="685800" cy="384048"/>
           </a:xfrm>
           <a:prstGeom prst="rect">
@@ -16347,7 +16347,73 @@
                 <a:ea typeface="Trebuchet MS" pitchFamily="34" charset="-122"/>
                 <a:cs typeface="Trebuchet MS" pitchFamily="34" charset="-120"/>
               </a:rPr>
-              <a:t>ly</a:t>
+              <a:t>l</a:t>
+            </a:r>
+            <a:endParaRPr lang="en-US" sz="900" dirty="0"/>
+          </a:p>
+        </p:txBody>
+      </p:sp>
+      <p:sp>
+        <p:nvSpPr>
+          <p:cNvPr id="50" name="Shape 48"/>
+          <p:cNvSpPr/>
+          <p:nvPr/>
+        </p:nvSpPr>
+        <p:spPr>
+          <a:xfrm>
+            <a:off x="7447135" y="4169664"/>
+            <a:ext cx="685800" cy="384048"/>
+          </a:xfrm>
+          <a:prstGeom prst="rect">
+            <a:avLst>
+              <a:gd name="adj" fmla="val 9524"/>
+            </a:avLst>
+          </a:prstGeom>
+          <a:solidFill>
+            <a:srgbClr val="FFFFFF"/>
+          </a:solidFill>
+          <a:ln w="12700">
+            <a:solidFill>
+              <a:srgbClr val="DB2777"/>
+            </a:solidFill>
+            <a:prstDash val="solid"/>
+          </a:ln>
+        </p:spPr>
+      </p:sp>
+      <p:sp>
+        <p:nvSpPr>
+          <p:cNvPr id="51" name="Text 49"/>
+          <p:cNvSpPr/>
+          <p:nvPr/>
+        </p:nvSpPr>
+        <p:spPr>
+          <a:xfrm>
+            <a:off x="7447135" y="4169664"/>
+            <a:ext cx="685800" cy="384048"/>
+          </a:xfrm>
+          <a:prstGeom prst="rect">
+            <a:avLst/>
+          </a:prstGeom>
+          <a:noFill/>
+          <a:ln/>
+        </p:spPr>
+        <p:txBody>
+          <a:bodyPr wrap="square" lIns="0" tIns="0" rIns="0" bIns="0" rtlCol="0" anchor="ctr"/>
+          <a:lstStyle/>
+          <a:p>
+            <a:pPr algn="ctr" indent="0" marL="0">
+              <a:buNone/>
+            </a:pPr>
+            <a:r>
+              <a:rPr lang="en-US" sz="900" b="1" dirty="0">
+                <a:solidFill>
+                  <a:srgbClr val="9D174D"/>
+                </a:solidFill>
+                <a:latin typeface="Trebuchet MS" pitchFamily="34" charset="0"/>
+                <a:ea typeface="Trebuchet MS" pitchFamily="34" charset="-122"/>
+                <a:cs typeface="Trebuchet MS" pitchFamily="34" charset="-120"/>
+              </a:rPr>
+              <a:t>y</a:t>
             </a:r>
             <a:endParaRPr lang="en-US" sz="900" dirty="0"/>
           </a:p>
@@ -17665,20 +17731,6 @@
               <a:buNone/>
             </a:pPr>
             <a:r>
-              <a:rPr lang="en-US" sz="1800" dirty="0">
-                <a:solidFill>
-                  <a:srgbClr val="0F172A"/>
-                </a:solidFill>
-                <a:latin typeface="Calibri" pitchFamily="34" charset="0"/>
-                <a:ea typeface="Calibri" pitchFamily="34" charset="-122"/>
-                <a:cs typeface="Calibri" pitchFamily="34" charset="-120"/>
-              </a:rPr>
-              <a:t>It is </a:t>
-            </a:r>
-            <a:pPr algn="l" indent="0" marL="0">
-              <a:buNone/>
-            </a:pPr>
-            <a:r>
               <a:rPr lang="en-US" sz="1800" b="1" dirty="0">
                 <a:solidFill>
                   <a:srgbClr val="0D9488"/>
@@ -17690,7 +17742,7 @@
                 <a:ea typeface="Calibri" pitchFamily="34" charset="-122"/>
                 <a:cs typeface="Calibri" pitchFamily="34" charset="-120"/>
               </a:rPr>
-              <a:t>unusual</a:t>
+              <a:t>Unusually</a:t>
             </a:r>
             <a:pPr algn="l" indent="0" marL="0">
               <a:buNone/>
@@ -17704,7 +17756,7 @@
                 <a:ea typeface="Calibri" pitchFamily="34" charset="-122"/>
                 <a:cs typeface="Calibri" pitchFamily="34" charset="-120"/>
               </a:rPr>
-              <a:t> that she doesn't </a:t>
+              <a:t>, the dog behaved well; it was </a:t>
             </a:r>
             <a:pPr algn="l" indent="0" marL="0">
               <a:buNone/>
@@ -17721,7 +17773,7 @@
                 <a:ea typeface="Calibri" pitchFamily="34" charset="-122"/>
                 <a:cs typeface="Calibri" pitchFamily="34" charset="-120"/>
               </a:rPr>
-              <a:t>usually</a:t>
+              <a:t>unusual</a:t>
             </a:r>
             <a:pPr algn="l" indent="0" marL="0">
               <a:buNone/>
@@ -17735,7 +17787,7 @@
                 <a:ea typeface="Calibri" pitchFamily="34" charset="-122"/>
                 <a:cs typeface="Calibri" pitchFamily="34" charset="-120"/>
               </a:rPr>
-              <a:t> act this way, but today her behaviour was </a:t>
+              <a:t> behaviour, though </a:t>
             </a:r>
             <a:pPr algn="l" indent="0" marL="0">
               <a:buNone/>
@@ -17752,7 +17804,7 @@
                 <a:ea typeface="Calibri" pitchFamily="34" charset="-122"/>
                 <a:cs typeface="Calibri" pitchFamily="34" charset="-120"/>
               </a:rPr>
-              <a:t>unusually</a:t>
+              <a:t>unusualness</a:t>
             </a:r>
             <a:pPr algn="l" indent="0" marL="0">
               <a:buNone/>
@@ -17766,7 +17818,7 @@
                 <a:ea typeface="Calibri" pitchFamily="34" charset="-122"/>
                 <a:cs typeface="Calibri" pitchFamily="34" charset="-120"/>
               </a:rPr>
-              <a:t> strange!</a:t>
+              <a:t> like that never lasts long!</a:t>
             </a:r>
             <a:endParaRPr lang="en-US" sz="1800" dirty="0"/>
           </a:p>
@@ -17921,7 +17973,7 @@
                 <a:ea typeface="Trebuchet MS" pitchFamily="34" charset="-122"/>
                 <a:cs typeface="Trebuchet MS" pitchFamily="34" charset="-120"/>
               </a:rPr>
-              <a:t>unusual</a:t>
+              <a:t>unusually</a:t>
             </a:r>
             <a:endParaRPr lang="en-US" sz="1400" dirty="0"/>
           </a:p>
@@ -18049,7 +18101,7 @@
                 <a:ea typeface="Trebuchet MS" pitchFamily="34" charset="-122"/>
                 <a:cs typeface="Trebuchet MS" pitchFamily="34" charset="-120"/>
               </a:rPr>
-              <a:t>usually</a:t>
+              <a:t>unusual</a:t>
             </a:r>
             <a:endParaRPr lang="en-US" sz="1400" dirty="0"/>
           </a:p>
@@ -18177,7 +18229,7 @@
                 <a:ea typeface="Trebuchet MS" pitchFamily="34" charset="-122"/>
                 <a:cs typeface="Trebuchet MS" pitchFamily="34" charset="-120"/>
               </a:rPr>
-              <a:t>unusually</a:t>
+              <a:t>unusualness</a:t>
             </a:r>
             <a:endParaRPr lang="en-US" sz="1400" dirty="0"/>
           </a:p>
@@ -18647,7 +18699,7 @@
                 <a:ea typeface="Trebuchet MS" pitchFamily="34" charset="-122"/>
                 <a:cs typeface="Trebuchet MS" pitchFamily="34" charset="-120"/>
               </a:rPr>
-              <a:t>unusual</a:t>
+              <a:t>unusually</a:t>
             </a:r>
             <a:endParaRPr lang="en-US" sz="2800" dirty="0"/>
           </a:p>
@@ -19474,7 +19526,7 @@
                 <a:ea typeface="Trebuchet MS" pitchFamily="34" charset="-122"/>
                 <a:cs typeface="Trebuchet MS" pitchFamily="34" charset="-120"/>
               </a:rPr>
-              <a:t>unusual</a:t>
+              <a:t>unusually</a:t>
             </a:r>
             <a:endParaRPr lang="en-US" sz="2800" dirty="0"/>
           </a:p>
@@ -19554,7 +19606,7 @@
         </p:nvSpPr>
         <p:spPr>
           <a:xfrm>
-            <a:off x="2938272" y="2258568"/>
+            <a:off x="2221992" y="2258568"/>
             <a:ext cx="1828800" cy="292608"/>
           </a:xfrm>
           <a:prstGeom prst="rect">
@@ -19588,7 +19640,7 @@
         </p:nvSpPr>
         <p:spPr>
           <a:xfrm>
-            <a:off x="2938272" y="2258568"/>
+            <a:off x="2221992" y="2258568"/>
             <a:ext cx="1828800" cy="292608"/>
           </a:xfrm>
           <a:prstGeom prst="rect">
@@ -19627,7 +19679,7 @@
         </p:nvSpPr>
         <p:spPr>
           <a:xfrm>
-            <a:off x="2938272" y="2569464"/>
+            <a:off x="2221992" y="2569464"/>
             <a:ext cx="1828800" cy="201168"/>
           </a:xfrm>
           <a:prstGeom prst="rect">
@@ -19666,7 +19718,7 @@
         </p:nvSpPr>
         <p:spPr>
           <a:xfrm>
-            <a:off x="5803392" y="2258568"/>
+            <a:off x="4370832" y="2258568"/>
             <a:ext cx="1828800" cy="292608"/>
           </a:xfrm>
           <a:prstGeom prst="rect">
@@ -19700,7 +19752,7 @@
         </p:nvSpPr>
         <p:spPr>
           <a:xfrm>
-            <a:off x="5803392" y="2258568"/>
+            <a:off x="4370832" y="2258568"/>
             <a:ext cx="1828800" cy="292608"/>
           </a:xfrm>
           <a:prstGeom prst="rect">
@@ -19739,7 +19791,7 @@
         </p:nvSpPr>
         <p:spPr>
           <a:xfrm>
-            <a:off x="5803392" y="2569464"/>
+            <a:off x="4370832" y="2569464"/>
             <a:ext cx="1828800" cy="201168"/>
           </a:xfrm>
           <a:prstGeom prst="rect">
@@ -19778,6 +19830,118 @@
         </p:nvSpPr>
         <p:spPr>
           <a:xfrm>
+            <a:off x="6519672" y="2258568"/>
+            <a:ext cx="1828800" cy="292608"/>
+          </a:xfrm>
+          <a:prstGeom prst="rect">
+            <a:avLst>
+              <a:gd name="adj" fmla="val 25000"/>
+            </a:avLst>
+          </a:prstGeom>
+          <a:solidFill>
+            <a:srgbClr val="FCE7F3"/>
+          </a:solidFill>
+          <a:ln w="19050">
+            <a:solidFill>
+              <a:srgbClr val="DB2777"/>
+            </a:solidFill>
+            <a:prstDash val="solid"/>
+          </a:ln>
+          <a:effectLst>
+            <a:outerShdw sx="100000" sy="100000" kx="0" ky="0" algn="bl" rotWithShape="0" blurRad="101600" dist="38100" dir="8100000">
+              <a:srgbClr val="000000">
+                <a:alpha val="12000"/>
+              </a:srgbClr>
+            </a:outerShdw>
+          </a:effectLst>
+        </p:spPr>
+      </p:sp>
+      <p:sp>
+        <p:nvSpPr>
+          <p:cNvPr id="23" name="Text 21"/>
+          <p:cNvSpPr/>
+          <p:nvPr/>
+        </p:nvSpPr>
+        <p:spPr>
+          <a:xfrm>
+            <a:off x="6519672" y="2258568"/>
+            <a:ext cx="1828800" cy="292608"/>
+          </a:xfrm>
+          <a:prstGeom prst="rect">
+            <a:avLst/>
+          </a:prstGeom>
+          <a:noFill/>
+          <a:ln/>
+        </p:spPr>
+        <p:txBody>
+          <a:bodyPr wrap="square" lIns="0" tIns="0" rIns="0" bIns="0" rtlCol="0" anchor="ctr"/>
+          <a:lstStyle/>
+          <a:p>
+            <a:pPr algn="ctr" indent="0" marL="0">
+              <a:buNone/>
+            </a:pPr>
+            <a:r>
+              <a:rPr lang="en-US" sz="1300" b="1" dirty="0">
+                <a:solidFill>
+                  <a:srgbClr val="9D174D"/>
+                </a:solidFill>
+                <a:latin typeface="Trebuchet MS" pitchFamily="34" charset="0"/>
+                <a:ea typeface="Trebuchet MS" pitchFamily="34" charset="-122"/>
+                <a:cs typeface="Trebuchet MS" pitchFamily="34" charset="-120"/>
+              </a:rPr>
+              <a:t>ly</a:t>
+            </a:r>
+            <a:endParaRPr lang="en-US" sz="1300" dirty="0"/>
+          </a:p>
+        </p:txBody>
+      </p:sp>
+      <p:sp>
+        <p:nvSpPr>
+          <p:cNvPr id="24" name="Text 22"/>
+          <p:cNvSpPr/>
+          <p:nvPr/>
+        </p:nvSpPr>
+        <p:spPr>
+          <a:xfrm>
+            <a:off x="6519672" y="2569464"/>
+            <a:ext cx="1828800" cy="201168"/>
+          </a:xfrm>
+          <a:prstGeom prst="rect">
+            <a:avLst/>
+          </a:prstGeom>
+          <a:noFill/>
+          <a:ln/>
+        </p:spPr>
+        <p:txBody>
+          <a:bodyPr wrap="square" lIns="0" tIns="0" rIns="0" bIns="0" rtlCol="0" anchor="t"/>
+          <a:lstStyle/>
+          <a:p>
+            <a:pPr algn="ctr" indent="0" marL="0">
+              <a:buNone/>
+            </a:pPr>
+            <a:r>
+              <a:rPr lang="en-US" sz="850" dirty="0">
+                <a:solidFill>
+                  <a:srgbClr val="475569"/>
+                </a:solidFill>
+                <a:latin typeface="Calibri" pitchFamily="34" charset="0"/>
+                <a:ea typeface="Calibri" pitchFamily="34" charset="-122"/>
+                <a:cs typeface="Calibri" pitchFamily="34" charset="-120"/>
+              </a:rPr>
+              <a:t>in a way</a:t>
+            </a:r>
+            <a:endParaRPr lang="en-US" sz="850" dirty="0"/>
+          </a:p>
+        </p:txBody>
+      </p:sp>
+      <p:sp>
+        <p:nvSpPr>
+          <p:cNvPr id="25" name="Shape 23"/>
+          <p:cNvSpPr/>
+          <p:nvPr/>
+        </p:nvSpPr>
+        <p:spPr>
+          <a:xfrm>
             <a:off x="365760" y="3273552"/>
             <a:ext cx="1371600" cy="658368"/>
           </a:xfrm>
@@ -19799,7 +19963,7 @@
       </p:sp>
       <p:sp>
         <p:nvSpPr>
-          <p:cNvPr id="23" name="Text 21"/>
+          <p:cNvPr id="26" name="Text 24"/>
           <p:cNvSpPr/>
           <p:nvPr/>
         </p:nvSpPr>
@@ -19838,7 +20002,7 @@
       </p:sp>
       <p:sp>
         <p:nvSpPr>
-          <p:cNvPr id="24" name="Shape 22"/>
+          <p:cNvPr id="27" name="Shape 25"/>
           <p:cNvSpPr/>
           <p:nvPr/>
         </p:nvSpPr>
@@ -19865,7 +20029,7 @@
       </p:sp>
       <p:sp>
         <p:nvSpPr>
-          <p:cNvPr id="25" name="Text 23"/>
+          <p:cNvPr id="28" name="Text 26"/>
           <p:cNvSpPr/>
           <p:nvPr/>
         </p:nvSpPr>
@@ -19904,7 +20068,7 @@
       </p:sp>
       <p:sp>
         <p:nvSpPr>
-          <p:cNvPr id="26" name="Shape 24"/>
+          <p:cNvPr id="29" name="Shape 27"/>
           <p:cNvSpPr/>
           <p:nvPr/>
         </p:nvSpPr>
@@ -19931,7 +20095,7 @@
       </p:sp>
       <p:sp>
         <p:nvSpPr>
-          <p:cNvPr id="27" name="Text 25"/>
+          <p:cNvPr id="30" name="Text 28"/>
           <p:cNvSpPr/>
           <p:nvPr/>
         </p:nvSpPr>
@@ -19970,7 +20134,7 @@
       </p:sp>
       <p:sp>
         <p:nvSpPr>
-          <p:cNvPr id="28" name="Shape 26"/>
+          <p:cNvPr id="31" name="Shape 29"/>
           <p:cNvSpPr/>
           <p:nvPr/>
         </p:nvSpPr>
@@ -19997,7 +20161,7 @@
       </p:sp>
       <p:sp>
         <p:nvSpPr>
-          <p:cNvPr id="29" name="Text 27"/>
+          <p:cNvPr id="32" name="Text 30"/>
           <p:cNvSpPr/>
           <p:nvPr/>
         </p:nvSpPr>
@@ -20459,7 +20623,7 @@
                 <a:ea typeface="Trebuchet MS" pitchFamily="34" charset="-122"/>
                 <a:cs typeface="Trebuchet MS" pitchFamily="34" charset="-120"/>
               </a:rPr>
-              <a:t>unusual</a:t>
+              <a:t>unusually</a:t>
             </a:r>
             <a:endParaRPr lang="en-US" sz="2800" dirty="0"/>
           </a:p>
@@ -20539,7 +20703,7 @@
         </p:nvSpPr>
         <p:spPr>
           <a:xfrm>
-            <a:off x="2938272" y="2258568"/>
+            <a:off x="2221992" y="2258568"/>
             <a:ext cx="1828800" cy="292608"/>
           </a:xfrm>
           <a:prstGeom prst="rect">
@@ -20573,7 +20737,7 @@
         </p:nvSpPr>
         <p:spPr>
           <a:xfrm>
-            <a:off x="2938272" y="2258568"/>
+            <a:off x="2221992" y="2258568"/>
             <a:ext cx="1828800" cy="292608"/>
           </a:xfrm>
           <a:prstGeom prst="rect">
@@ -20612,7 +20776,7 @@
         </p:nvSpPr>
         <p:spPr>
           <a:xfrm>
-            <a:off x="2938272" y="2569464"/>
+            <a:off x="2221992" y="2569464"/>
             <a:ext cx="1828800" cy="201168"/>
           </a:xfrm>
           <a:prstGeom prst="rect">
@@ -20651,7 +20815,7 @@
         </p:nvSpPr>
         <p:spPr>
           <a:xfrm>
-            <a:off x="5803392" y="2258568"/>
+            <a:off x="4370832" y="2258568"/>
             <a:ext cx="1828800" cy="292608"/>
           </a:xfrm>
           <a:prstGeom prst="rect">
@@ -20685,7 +20849,7 @@
         </p:nvSpPr>
         <p:spPr>
           <a:xfrm>
-            <a:off x="5803392" y="2258568"/>
+            <a:off x="4370832" y="2258568"/>
             <a:ext cx="1828800" cy="292608"/>
           </a:xfrm>
           <a:prstGeom prst="rect">
@@ -20724,7 +20888,7 @@
         </p:nvSpPr>
         <p:spPr>
           <a:xfrm>
-            <a:off x="5803392" y="2569464"/>
+            <a:off x="4370832" y="2569464"/>
             <a:ext cx="1828800" cy="201168"/>
           </a:xfrm>
           <a:prstGeom prst="rect">
@@ -20763,6 +20927,118 @@
         </p:nvSpPr>
         <p:spPr>
           <a:xfrm>
+            <a:off x="6519672" y="2258568"/>
+            <a:ext cx="1828800" cy="292608"/>
+          </a:xfrm>
+          <a:prstGeom prst="rect">
+            <a:avLst>
+              <a:gd name="adj" fmla="val 25000"/>
+            </a:avLst>
+          </a:prstGeom>
+          <a:solidFill>
+            <a:srgbClr val="FCE7F3"/>
+          </a:solidFill>
+          <a:ln w="19050">
+            <a:solidFill>
+              <a:srgbClr val="DB2777"/>
+            </a:solidFill>
+            <a:prstDash val="solid"/>
+          </a:ln>
+          <a:effectLst>
+            <a:outerShdw sx="100000" sy="100000" kx="0" ky="0" algn="bl" rotWithShape="0" blurRad="101600" dist="38100" dir="8100000">
+              <a:srgbClr val="000000">
+                <a:alpha val="12000"/>
+              </a:srgbClr>
+            </a:outerShdw>
+          </a:effectLst>
+        </p:spPr>
+      </p:sp>
+      <p:sp>
+        <p:nvSpPr>
+          <p:cNvPr id="23" name="Text 21"/>
+          <p:cNvSpPr/>
+          <p:nvPr/>
+        </p:nvSpPr>
+        <p:spPr>
+          <a:xfrm>
+            <a:off x="6519672" y="2258568"/>
+            <a:ext cx="1828800" cy="292608"/>
+          </a:xfrm>
+          <a:prstGeom prst="rect">
+            <a:avLst/>
+          </a:prstGeom>
+          <a:noFill/>
+          <a:ln/>
+        </p:spPr>
+        <p:txBody>
+          <a:bodyPr wrap="square" lIns="0" tIns="0" rIns="0" bIns="0" rtlCol="0" anchor="ctr"/>
+          <a:lstStyle/>
+          <a:p>
+            <a:pPr algn="ctr" indent="0" marL="0">
+              <a:buNone/>
+            </a:pPr>
+            <a:r>
+              <a:rPr lang="en-US" sz="1300" b="1" dirty="0">
+                <a:solidFill>
+                  <a:srgbClr val="9D174D"/>
+                </a:solidFill>
+                <a:latin typeface="Trebuchet MS" pitchFamily="34" charset="0"/>
+                <a:ea typeface="Trebuchet MS" pitchFamily="34" charset="-122"/>
+                <a:cs typeface="Trebuchet MS" pitchFamily="34" charset="-120"/>
+              </a:rPr>
+              <a:t>ly</a:t>
+            </a:r>
+            <a:endParaRPr lang="en-US" sz="1300" dirty="0"/>
+          </a:p>
+        </p:txBody>
+      </p:sp>
+      <p:sp>
+        <p:nvSpPr>
+          <p:cNvPr id="24" name="Text 22"/>
+          <p:cNvSpPr/>
+          <p:nvPr/>
+        </p:nvSpPr>
+        <p:spPr>
+          <a:xfrm>
+            <a:off x="6519672" y="2569464"/>
+            <a:ext cx="1828800" cy="201168"/>
+          </a:xfrm>
+          <a:prstGeom prst="rect">
+            <a:avLst/>
+          </a:prstGeom>
+          <a:noFill/>
+          <a:ln/>
+        </p:spPr>
+        <p:txBody>
+          <a:bodyPr wrap="square" lIns="0" tIns="0" rIns="0" bIns="0" rtlCol="0" anchor="t"/>
+          <a:lstStyle/>
+          <a:p>
+            <a:pPr algn="ctr" indent="0" marL="0">
+              <a:buNone/>
+            </a:pPr>
+            <a:r>
+              <a:rPr lang="en-US" sz="850" dirty="0">
+                <a:solidFill>
+                  <a:srgbClr val="475569"/>
+                </a:solidFill>
+                <a:latin typeface="Calibri" pitchFamily="34" charset="0"/>
+                <a:ea typeface="Calibri" pitchFamily="34" charset="-122"/>
+                <a:cs typeface="Calibri" pitchFamily="34" charset="-120"/>
+              </a:rPr>
+              <a:t>in a way</a:t>
+            </a:r>
+            <a:endParaRPr lang="en-US" sz="850" dirty="0"/>
+          </a:p>
+        </p:txBody>
+      </p:sp>
+      <p:sp>
+        <p:nvSpPr>
+          <p:cNvPr id="25" name="Shape 23"/>
+          <p:cNvSpPr/>
+          <p:nvPr/>
+        </p:nvSpPr>
+        <p:spPr>
+          <a:xfrm>
             <a:off x="365760" y="3273552"/>
             <a:ext cx="1371600" cy="658368"/>
           </a:xfrm>
@@ -20784,7 +21060,7 @@
       </p:sp>
       <p:sp>
         <p:nvSpPr>
-          <p:cNvPr id="23" name="Text 21"/>
+          <p:cNvPr id="26" name="Text 24"/>
           <p:cNvSpPr/>
           <p:nvPr/>
         </p:nvSpPr>
@@ -20823,7 +21099,7 @@
       </p:sp>
       <p:sp>
         <p:nvSpPr>
-          <p:cNvPr id="24" name="Shape 22"/>
+          <p:cNvPr id="27" name="Shape 25"/>
           <p:cNvSpPr/>
           <p:nvPr/>
         </p:nvSpPr>
@@ -20850,14 +21126,14 @@
       </p:sp>
       <p:sp>
         <p:nvSpPr>
-          <p:cNvPr id="25" name="Shape 23"/>
-          <p:cNvSpPr/>
-          <p:nvPr/>
-        </p:nvSpPr>
-        <p:spPr>
-          <a:xfrm>
-            <a:off x="1975104" y="3364992"/>
-            <a:ext cx="1554480" cy="475488"/>
+          <p:cNvPr id="28" name="Shape 26"/>
+          <p:cNvSpPr/>
+          <p:nvPr/>
+        </p:nvSpPr>
+        <p:spPr>
+          <a:xfrm>
+            <a:off x="1978152" y="3364992"/>
+            <a:ext cx="1225296" cy="475488"/>
           </a:xfrm>
           <a:prstGeom prst="rect">
             <a:avLst>
@@ -20877,14 +21153,14 @@
       </p:sp>
       <p:sp>
         <p:nvSpPr>
-          <p:cNvPr id="26" name="Text 24"/>
-          <p:cNvSpPr/>
-          <p:nvPr/>
-        </p:nvSpPr>
-        <p:spPr>
-          <a:xfrm>
-            <a:off x="1975104" y="3364992"/>
-            <a:ext cx="1554480" cy="475488"/>
+          <p:cNvPr id="29" name="Text 27"/>
+          <p:cNvSpPr/>
+          <p:nvPr/>
+        </p:nvSpPr>
+        <p:spPr>
+          <a:xfrm>
+            <a:off x="1978152" y="3364992"/>
+            <a:ext cx="1225296" cy="475488"/>
           </a:xfrm>
           <a:prstGeom prst="rect">
             <a:avLst/>
@@ -20916,14 +21192,14 @@
       </p:sp>
       <p:sp>
         <p:nvSpPr>
-          <p:cNvPr id="27" name="Text 25"/>
-          <p:cNvSpPr/>
-          <p:nvPr/>
-        </p:nvSpPr>
-        <p:spPr>
-          <a:xfrm>
-            <a:off x="3529584" y="3364992"/>
-            <a:ext cx="73152" cy="475488"/>
+          <p:cNvPr id="30" name="Text 28"/>
+          <p:cNvSpPr/>
+          <p:nvPr/>
+        </p:nvSpPr>
+        <p:spPr>
+          <a:xfrm>
+            <a:off x="3203448" y="3364992"/>
+            <a:ext cx="76200" cy="475488"/>
           </a:xfrm>
           <a:prstGeom prst="rect">
             <a:avLst/>
@@ -20955,14 +21231,14 @@
       </p:sp>
       <p:sp>
         <p:nvSpPr>
-          <p:cNvPr id="28" name="Shape 26"/>
-          <p:cNvSpPr/>
-          <p:nvPr/>
-        </p:nvSpPr>
-        <p:spPr>
-          <a:xfrm>
-            <a:off x="3602736" y="3364992"/>
-            <a:ext cx="1554480" cy="475488"/>
+          <p:cNvPr id="31" name="Shape 29"/>
+          <p:cNvSpPr/>
+          <p:nvPr/>
+        </p:nvSpPr>
+        <p:spPr>
+          <a:xfrm>
+            <a:off x="3279648" y="3364992"/>
+            <a:ext cx="1225296" cy="475488"/>
           </a:xfrm>
           <a:prstGeom prst="rect">
             <a:avLst>
@@ -20982,14 +21258,14 @@
       </p:sp>
       <p:sp>
         <p:nvSpPr>
-          <p:cNvPr id="29" name="Text 27"/>
-          <p:cNvSpPr/>
-          <p:nvPr/>
-        </p:nvSpPr>
-        <p:spPr>
-          <a:xfrm>
-            <a:off x="3602736" y="3364992"/>
-            <a:ext cx="1554480" cy="475488"/>
+          <p:cNvPr id="32" name="Text 30"/>
+          <p:cNvSpPr/>
+          <p:nvPr/>
+        </p:nvSpPr>
+        <p:spPr>
+          <a:xfrm>
+            <a:off x="3279648" y="3364992"/>
+            <a:ext cx="1225296" cy="475488"/>
           </a:xfrm>
           <a:prstGeom prst="rect">
             <a:avLst/>
@@ -21021,14 +21297,14 @@
       </p:sp>
       <p:sp>
         <p:nvSpPr>
-          <p:cNvPr id="30" name="Text 28"/>
-          <p:cNvSpPr/>
-          <p:nvPr/>
-        </p:nvSpPr>
-        <p:spPr>
-          <a:xfrm>
-            <a:off x="5157216" y="3364992"/>
-            <a:ext cx="73152" cy="475488"/>
+          <p:cNvPr id="33" name="Text 31"/>
+          <p:cNvSpPr/>
+          <p:nvPr/>
+        </p:nvSpPr>
+        <p:spPr>
+          <a:xfrm>
+            <a:off x="4504944" y="3364992"/>
+            <a:ext cx="76200" cy="475488"/>
           </a:xfrm>
           <a:prstGeom prst="rect">
             <a:avLst/>
@@ -21060,14 +21336,14 @@
       </p:sp>
       <p:sp>
         <p:nvSpPr>
-          <p:cNvPr id="31" name="Shape 29"/>
-          <p:cNvSpPr/>
-          <p:nvPr/>
-        </p:nvSpPr>
-        <p:spPr>
-          <a:xfrm>
-            <a:off x="5230368" y="3364992"/>
-            <a:ext cx="1554480" cy="475488"/>
+          <p:cNvPr id="34" name="Shape 32"/>
+          <p:cNvSpPr/>
+          <p:nvPr/>
+        </p:nvSpPr>
+        <p:spPr>
+          <a:xfrm>
+            <a:off x="4581144" y="3364992"/>
+            <a:ext cx="1225296" cy="475488"/>
           </a:xfrm>
           <a:prstGeom prst="rect">
             <a:avLst>
@@ -21087,14 +21363,14 @@
       </p:sp>
       <p:sp>
         <p:nvSpPr>
-          <p:cNvPr id="32" name="Text 30"/>
-          <p:cNvSpPr/>
-          <p:nvPr/>
-        </p:nvSpPr>
-        <p:spPr>
-          <a:xfrm>
-            <a:off x="5230368" y="3364992"/>
-            <a:ext cx="1554480" cy="475488"/>
+          <p:cNvPr id="35" name="Text 33"/>
+          <p:cNvSpPr/>
+          <p:nvPr/>
+        </p:nvSpPr>
+        <p:spPr>
+          <a:xfrm>
+            <a:off x="4581144" y="3364992"/>
+            <a:ext cx="1225296" cy="475488"/>
           </a:xfrm>
           <a:prstGeom prst="rect">
             <a:avLst/>
@@ -21126,14 +21402,14 @@
       </p:sp>
       <p:sp>
         <p:nvSpPr>
-          <p:cNvPr id="33" name="Text 31"/>
-          <p:cNvSpPr/>
-          <p:nvPr/>
-        </p:nvSpPr>
-        <p:spPr>
-          <a:xfrm>
-            <a:off x="6784848" y="3364992"/>
-            <a:ext cx="73152" cy="475488"/>
+          <p:cNvPr id="36" name="Text 34"/>
+          <p:cNvSpPr/>
+          <p:nvPr/>
+        </p:nvSpPr>
+        <p:spPr>
+          <a:xfrm>
+            <a:off x="5806440" y="3364992"/>
+            <a:ext cx="76200" cy="475488"/>
           </a:xfrm>
           <a:prstGeom prst="rect">
             <a:avLst/>
@@ -21165,14 +21441,14 @@
       </p:sp>
       <p:sp>
         <p:nvSpPr>
-          <p:cNvPr id="34" name="Shape 32"/>
-          <p:cNvSpPr/>
-          <p:nvPr/>
-        </p:nvSpPr>
-        <p:spPr>
-          <a:xfrm>
-            <a:off x="6858000" y="3364992"/>
-            <a:ext cx="1554480" cy="475488"/>
+          <p:cNvPr id="37" name="Shape 35"/>
+          <p:cNvSpPr/>
+          <p:nvPr/>
+        </p:nvSpPr>
+        <p:spPr>
+          <a:xfrm>
+            <a:off x="5882640" y="3364992"/>
+            <a:ext cx="1225296" cy="475488"/>
           </a:xfrm>
           <a:prstGeom prst="rect">
             <a:avLst>
@@ -21192,14 +21468,14 @@
       </p:sp>
       <p:sp>
         <p:nvSpPr>
-          <p:cNvPr id="35" name="Text 33"/>
-          <p:cNvSpPr/>
-          <p:nvPr/>
-        </p:nvSpPr>
-        <p:spPr>
-          <a:xfrm>
-            <a:off x="6858000" y="3364992"/>
-            <a:ext cx="1554480" cy="475488"/>
+          <p:cNvPr id="38" name="Text 36"/>
+          <p:cNvSpPr/>
+          <p:nvPr/>
+        </p:nvSpPr>
+        <p:spPr>
+          <a:xfrm>
+            <a:off x="5882640" y="3364992"/>
+            <a:ext cx="1225296" cy="475488"/>
           </a:xfrm>
           <a:prstGeom prst="rect">
             <a:avLst/>
@@ -21231,7 +21507,112 @@
       </p:sp>
       <p:sp>
         <p:nvSpPr>
-          <p:cNvPr id="36" name="Shape 34"/>
+          <p:cNvPr id="39" name="Text 37"/>
+          <p:cNvSpPr/>
+          <p:nvPr/>
+        </p:nvSpPr>
+        <p:spPr>
+          <a:xfrm>
+            <a:off x="7107936" y="3364992"/>
+            <a:ext cx="76200" cy="475488"/>
+          </a:xfrm>
+          <a:prstGeom prst="rect">
+            <a:avLst/>
+          </a:prstGeom>
+          <a:noFill/>
+          <a:ln/>
+        </p:spPr>
+        <p:txBody>
+          <a:bodyPr wrap="square" lIns="0" tIns="0" rIns="0" bIns="0" rtlCol="0" anchor="ctr"/>
+          <a:lstStyle/>
+          <a:p>
+            <a:pPr algn="ctr" indent="0" marL="0">
+              <a:buNone/>
+            </a:pPr>
+            <a:r>
+              <a:rPr lang="en-US" sz="1600" b="1" dirty="0">
+                <a:solidFill>
+                  <a:srgbClr val="0D9488"/>
+                </a:solidFill>
+                <a:latin typeface="Trebuchet MS" pitchFamily="34" charset="0"/>
+                <a:ea typeface="Trebuchet MS" pitchFamily="34" charset="-122"/>
+                <a:cs typeface="Trebuchet MS" pitchFamily="34" charset="-120"/>
+              </a:rPr>
+              <a:t>·</a:t>
+            </a:r>
+            <a:endParaRPr lang="en-US" sz="1600" dirty="0"/>
+          </a:p>
+        </p:txBody>
+      </p:sp>
+      <p:sp>
+        <p:nvSpPr>
+          <p:cNvPr id="40" name="Shape 38"/>
+          <p:cNvSpPr/>
+          <p:nvPr/>
+        </p:nvSpPr>
+        <p:spPr>
+          <a:xfrm>
+            <a:off x="7184136" y="3364992"/>
+            <a:ext cx="1225296" cy="475488"/>
+          </a:xfrm>
+          <a:prstGeom prst="rect">
+            <a:avLst>
+              <a:gd name="adj" fmla="val 9615"/>
+            </a:avLst>
+          </a:prstGeom>
+          <a:solidFill>
+            <a:srgbClr val="FFFFFF"/>
+          </a:solidFill>
+          <a:ln w="12700">
+            <a:solidFill>
+              <a:srgbClr val="0D9488"/>
+            </a:solidFill>
+            <a:prstDash val="solid"/>
+          </a:ln>
+        </p:spPr>
+      </p:sp>
+      <p:sp>
+        <p:nvSpPr>
+          <p:cNvPr id="41" name="Text 39"/>
+          <p:cNvSpPr/>
+          <p:nvPr/>
+        </p:nvSpPr>
+        <p:spPr>
+          <a:xfrm>
+            <a:off x="7184136" y="3364992"/>
+            <a:ext cx="1225296" cy="475488"/>
+          </a:xfrm>
+          <a:prstGeom prst="rect">
+            <a:avLst/>
+          </a:prstGeom>
+          <a:noFill/>
+          <a:ln/>
+        </p:spPr>
+        <p:txBody>
+          <a:bodyPr wrap="square" lIns="0" tIns="0" rIns="0" bIns="0" rtlCol="0" anchor="ctr"/>
+          <a:lstStyle/>
+          <a:p>
+            <a:pPr algn="ctr" indent="0" marL="0">
+              <a:buNone/>
+            </a:pPr>
+            <a:r>
+              <a:rPr lang="en-US" sz="1400" b="1" dirty="0">
+                <a:solidFill>
+                  <a:srgbClr val="0D9488"/>
+                </a:solidFill>
+                <a:latin typeface="Trebuchet MS" pitchFamily="34" charset="0"/>
+                <a:ea typeface="Trebuchet MS" pitchFamily="34" charset="-122"/>
+                <a:cs typeface="Trebuchet MS" pitchFamily="34" charset="-120"/>
+              </a:rPr>
+              <a:t>ly</a:t>
+            </a:r>
+            <a:endParaRPr lang="en-US" sz="1400" dirty="0"/>
+          </a:p>
+        </p:txBody>
+      </p:sp>
+      <p:sp>
+        <p:nvSpPr>
+          <p:cNvPr id="42" name="Shape 40"/>
           <p:cNvSpPr/>
           <p:nvPr/>
         </p:nvSpPr>
@@ -21258,7 +21639,7 @@
       </p:sp>
       <p:sp>
         <p:nvSpPr>
-          <p:cNvPr id="37" name="Text 35"/>
+          <p:cNvPr id="43" name="Text 41"/>
           <p:cNvSpPr/>
           <p:nvPr/>
         </p:nvSpPr>
@@ -21297,7 +21678,7 @@
       </p:sp>
       <p:sp>
         <p:nvSpPr>
-          <p:cNvPr id="38" name="Shape 36"/>
+          <p:cNvPr id="44" name="Shape 42"/>
           <p:cNvSpPr/>
           <p:nvPr/>
         </p:nvSpPr>
@@ -21324,7 +21705,7 @@
       </p:sp>
       <p:sp>
         <p:nvSpPr>
-          <p:cNvPr id="39" name="Text 37"/>
+          <p:cNvPr id="45" name="Text 43"/>
           <p:cNvSpPr/>
           <p:nvPr/>
         </p:nvSpPr>
@@ -21786,7 +22167,7 @@
                 <a:ea typeface="Trebuchet MS" pitchFamily="34" charset="-122"/>
                 <a:cs typeface="Trebuchet MS" pitchFamily="34" charset="-120"/>
               </a:rPr>
-              <a:t>unusual</a:t>
+              <a:t>unusually</a:t>
             </a:r>
             <a:endParaRPr lang="en-US" sz="2800" dirty="0"/>
           </a:p>
@@ -21866,7 +22247,7 @@
         </p:nvSpPr>
         <p:spPr>
           <a:xfrm>
-            <a:off x="2938272" y="2258568"/>
+            <a:off x="2221992" y="2258568"/>
             <a:ext cx="1828800" cy="292608"/>
           </a:xfrm>
           <a:prstGeom prst="rect">
@@ -21900,7 +22281,7 @@
         </p:nvSpPr>
         <p:spPr>
           <a:xfrm>
-            <a:off x="2938272" y="2258568"/>
+            <a:off x="2221992" y="2258568"/>
             <a:ext cx="1828800" cy="292608"/>
           </a:xfrm>
           <a:prstGeom prst="rect">
@@ -21939,7 +22320,7 @@
         </p:nvSpPr>
         <p:spPr>
           <a:xfrm>
-            <a:off x="2938272" y="2569464"/>
+            <a:off x="2221992" y="2569464"/>
             <a:ext cx="1828800" cy="201168"/>
           </a:xfrm>
           <a:prstGeom prst="rect">
@@ -21978,7 +22359,7 @@
         </p:nvSpPr>
         <p:spPr>
           <a:xfrm>
-            <a:off x="5803392" y="2258568"/>
+            <a:off x="4370832" y="2258568"/>
             <a:ext cx="1828800" cy="292608"/>
           </a:xfrm>
           <a:prstGeom prst="rect">
@@ -22012,7 +22393,7 @@
         </p:nvSpPr>
         <p:spPr>
           <a:xfrm>
-            <a:off x="5803392" y="2258568"/>
+            <a:off x="4370832" y="2258568"/>
             <a:ext cx="1828800" cy="292608"/>
           </a:xfrm>
           <a:prstGeom prst="rect">
@@ -22051,7 +22432,7 @@
         </p:nvSpPr>
         <p:spPr>
           <a:xfrm>
-            <a:off x="5803392" y="2569464"/>
+            <a:off x="4370832" y="2569464"/>
             <a:ext cx="1828800" cy="201168"/>
           </a:xfrm>
           <a:prstGeom prst="rect">
@@ -22090,6 +22471,118 @@
         </p:nvSpPr>
         <p:spPr>
           <a:xfrm>
+            <a:off x="6519672" y="2258568"/>
+            <a:ext cx="1828800" cy="292608"/>
+          </a:xfrm>
+          <a:prstGeom prst="rect">
+            <a:avLst>
+              <a:gd name="adj" fmla="val 25000"/>
+            </a:avLst>
+          </a:prstGeom>
+          <a:solidFill>
+            <a:srgbClr val="FCE7F3"/>
+          </a:solidFill>
+          <a:ln w="19050">
+            <a:solidFill>
+              <a:srgbClr val="DB2777"/>
+            </a:solidFill>
+            <a:prstDash val="solid"/>
+          </a:ln>
+          <a:effectLst>
+            <a:outerShdw sx="100000" sy="100000" kx="0" ky="0" algn="bl" rotWithShape="0" blurRad="101600" dist="38100" dir="8100000">
+              <a:srgbClr val="000000">
+                <a:alpha val="12000"/>
+              </a:srgbClr>
+            </a:outerShdw>
+          </a:effectLst>
+        </p:spPr>
+      </p:sp>
+      <p:sp>
+        <p:nvSpPr>
+          <p:cNvPr id="23" name="Text 21"/>
+          <p:cNvSpPr/>
+          <p:nvPr/>
+        </p:nvSpPr>
+        <p:spPr>
+          <a:xfrm>
+            <a:off x="6519672" y="2258568"/>
+            <a:ext cx="1828800" cy="292608"/>
+          </a:xfrm>
+          <a:prstGeom prst="rect">
+            <a:avLst/>
+          </a:prstGeom>
+          <a:noFill/>
+          <a:ln/>
+        </p:spPr>
+        <p:txBody>
+          <a:bodyPr wrap="square" lIns="0" tIns="0" rIns="0" bIns="0" rtlCol="0" anchor="ctr"/>
+          <a:lstStyle/>
+          <a:p>
+            <a:pPr algn="ctr" indent="0" marL="0">
+              <a:buNone/>
+            </a:pPr>
+            <a:r>
+              <a:rPr lang="en-US" sz="1300" b="1" dirty="0">
+                <a:solidFill>
+                  <a:srgbClr val="9D174D"/>
+                </a:solidFill>
+                <a:latin typeface="Trebuchet MS" pitchFamily="34" charset="0"/>
+                <a:ea typeface="Trebuchet MS" pitchFamily="34" charset="-122"/>
+                <a:cs typeface="Trebuchet MS" pitchFamily="34" charset="-120"/>
+              </a:rPr>
+              <a:t>ly</a:t>
+            </a:r>
+            <a:endParaRPr lang="en-US" sz="1300" dirty="0"/>
+          </a:p>
+        </p:txBody>
+      </p:sp>
+      <p:sp>
+        <p:nvSpPr>
+          <p:cNvPr id="24" name="Text 22"/>
+          <p:cNvSpPr/>
+          <p:nvPr/>
+        </p:nvSpPr>
+        <p:spPr>
+          <a:xfrm>
+            <a:off x="6519672" y="2569464"/>
+            <a:ext cx="1828800" cy="201168"/>
+          </a:xfrm>
+          <a:prstGeom prst="rect">
+            <a:avLst/>
+          </a:prstGeom>
+          <a:noFill/>
+          <a:ln/>
+        </p:spPr>
+        <p:txBody>
+          <a:bodyPr wrap="square" lIns="0" tIns="0" rIns="0" bIns="0" rtlCol="0" anchor="t"/>
+          <a:lstStyle/>
+          <a:p>
+            <a:pPr algn="ctr" indent="0" marL="0">
+              <a:buNone/>
+            </a:pPr>
+            <a:r>
+              <a:rPr lang="en-US" sz="850" dirty="0">
+                <a:solidFill>
+                  <a:srgbClr val="475569"/>
+                </a:solidFill>
+                <a:latin typeface="Calibri" pitchFamily="34" charset="0"/>
+                <a:ea typeface="Calibri" pitchFamily="34" charset="-122"/>
+                <a:cs typeface="Calibri" pitchFamily="34" charset="-120"/>
+              </a:rPr>
+              <a:t>in a way</a:t>
+            </a:r>
+            <a:endParaRPr lang="en-US" sz="850" dirty="0"/>
+          </a:p>
+        </p:txBody>
+      </p:sp>
+      <p:sp>
+        <p:nvSpPr>
+          <p:cNvPr id="25" name="Shape 23"/>
+          <p:cNvSpPr/>
+          <p:nvPr/>
+        </p:nvSpPr>
+        <p:spPr>
+          <a:xfrm>
             <a:off x="365760" y="3273552"/>
             <a:ext cx="1371600" cy="658368"/>
           </a:xfrm>
@@ -22111,7 +22604,7 @@
       </p:sp>
       <p:sp>
         <p:nvSpPr>
-          <p:cNvPr id="23" name="Text 21"/>
+          <p:cNvPr id="26" name="Text 24"/>
           <p:cNvSpPr/>
           <p:nvPr/>
         </p:nvSpPr>
@@ -22150,7 +22643,7 @@
       </p:sp>
       <p:sp>
         <p:nvSpPr>
-          <p:cNvPr id="24" name="Shape 22"/>
+          <p:cNvPr id="27" name="Shape 25"/>
           <p:cNvSpPr/>
           <p:nvPr/>
         </p:nvSpPr>
@@ -22177,14 +22670,14 @@
       </p:sp>
       <p:sp>
         <p:nvSpPr>
-          <p:cNvPr id="25" name="Shape 23"/>
-          <p:cNvSpPr/>
-          <p:nvPr/>
-        </p:nvSpPr>
-        <p:spPr>
-          <a:xfrm>
-            <a:off x="1975104" y="3364992"/>
-            <a:ext cx="1554480" cy="475488"/>
+          <p:cNvPr id="28" name="Shape 26"/>
+          <p:cNvSpPr/>
+          <p:nvPr/>
+        </p:nvSpPr>
+        <p:spPr>
+          <a:xfrm>
+            <a:off x="1978152" y="3364992"/>
+            <a:ext cx="1225296" cy="475488"/>
           </a:xfrm>
           <a:prstGeom prst="rect">
             <a:avLst>
@@ -22204,14 +22697,14 @@
       </p:sp>
       <p:sp>
         <p:nvSpPr>
-          <p:cNvPr id="26" name="Text 24"/>
-          <p:cNvSpPr/>
-          <p:nvPr/>
-        </p:nvSpPr>
-        <p:spPr>
-          <a:xfrm>
-            <a:off x="1975104" y="3364992"/>
-            <a:ext cx="1554480" cy="475488"/>
+          <p:cNvPr id="29" name="Text 27"/>
+          <p:cNvSpPr/>
+          <p:nvPr/>
+        </p:nvSpPr>
+        <p:spPr>
+          <a:xfrm>
+            <a:off x="1978152" y="3364992"/>
+            <a:ext cx="1225296" cy="475488"/>
           </a:xfrm>
           <a:prstGeom prst="rect">
             <a:avLst/>
@@ -22243,14 +22736,14 @@
       </p:sp>
       <p:sp>
         <p:nvSpPr>
-          <p:cNvPr id="27" name="Text 25"/>
-          <p:cNvSpPr/>
-          <p:nvPr/>
-        </p:nvSpPr>
-        <p:spPr>
-          <a:xfrm>
-            <a:off x="3529584" y="3364992"/>
-            <a:ext cx="73152" cy="475488"/>
+          <p:cNvPr id="30" name="Text 28"/>
+          <p:cNvSpPr/>
+          <p:nvPr/>
+        </p:nvSpPr>
+        <p:spPr>
+          <a:xfrm>
+            <a:off x="3203448" y="3364992"/>
+            <a:ext cx="76200" cy="475488"/>
           </a:xfrm>
           <a:prstGeom prst="rect">
             <a:avLst/>
@@ -22282,14 +22775,14 @@
       </p:sp>
       <p:sp>
         <p:nvSpPr>
-          <p:cNvPr id="28" name="Shape 26"/>
-          <p:cNvSpPr/>
-          <p:nvPr/>
-        </p:nvSpPr>
-        <p:spPr>
-          <a:xfrm>
-            <a:off x="3602736" y="3364992"/>
-            <a:ext cx="1554480" cy="475488"/>
+          <p:cNvPr id="31" name="Shape 29"/>
+          <p:cNvSpPr/>
+          <p:nvPr/>
+        </p:nvSpPr>
+        <p:spPr>
+          <a:xfrm>
+            <a:off x="3279648" y="3364992"/>
+            <a:ext cx="1225296" cy="475488"/>
           </a:xfrm>
           <a:prstGeom prst="rect">
             <a:avLst>
@@ -22309,14 +22802,14 @@
       </p:sp>
       <p:sp>
         <p:nvSpPr>
-          <p:cNvPr id="29" name="Text 27"/>
-          <p:cNvSpPr/>
-          <p:nvPr/>
-        </p:nvSpPr>
-        <p:spPr>
-          <a:xfrm>
-            <a:off x="3602736" y="3364992"/>
-            <a:ext cx="1554480" cy="475488"/>
+          <p:cNvPr id="32" name="Text 30"/>
+          <p:cNvSpPr/>
+          <p:nvPr/>
+        </p:nvSpPr>
+        <p:spPr>
+          <a:xfrm>
+            <a:off x="3279648" y="3364992"/>
+            <a:ext cx="1225296" cy="475488"/>
           </a:xfrm>
           <a:prstGeom prst="rect">
             <a:avLst/>
@@ -22348,14 +22841,14 @@
       </p:sp>
       <p:sp>
         <p:nvSpPr>
-          <p:cNvPr id="30" name="Text 28"/>
-          <p:cNvSpPr/>
-          <p:nvPr/>
-        </p:nvSpPr>
-        <p:spPr>
-          <a:xfrm>
-            <a:off x="5157216" y="3364992"/>
-            <a:ext cx="73152" cy="475488"/>
+          <p:cNvPr id="33" name="Text 31"/>
+          <p:cNvSpPr/>
+          <p:nvPr/>
+        </p:nvSpPr>
+        <p:spPr>
+          <a:xfrm>
+            <a:off x="4504944" y="3364992"/>
+            <a:ext cx="76200" cy="475488"/>
           </a:xfrm>
           <a:prstGeom prst="rect">
             <a:avLst/>
@@ -22387,14 +22880,14 @@
       </p:sp>
       <p:sp>
         <p:nvSpPr>
-          <p:cNvPr id="31" name="Shape 29"/>
-          <p:cNvSpPr/>
-          <p:nvPr/>
-        </p:nvSpPr>
-        <p:spPr>
-          <a:xfrm>
-            <a:off x="5230368" y="3364992"/>
-            <a:ext cx="1554480" cy="475488"/>
+          <p:cNvPr id="34" name="Shape 32"/>
+          <p:cNvSpPr/>
+          <p:nvPr/>
+        </p:nvSpPr>
+        <p:spPr>
+          <a:xfrm>
+            <a:off x="4581144" y="3364992"/>
+            <a:ext cx="1225296" cy="475488"/>
           </a:xfrm>
           <a:prstGeom prst="rect">
             <a:avLst>
@@ -22414,14 +22907,14 @@
       </p:sp>
       <p:sp>
         <p:nvSpPr>
-          <p:cNvPr id="32" name="Text 30"/>
-          <p:cNvSpPr/>
-          <p:nvPr/>
-        </p:nvSpPr>
-        <p:spPr>
-          <a:xfrm>
-            <a:off x="5230368" y="3364992"/>
-            <a:ext cx="1554480" cy="475488"/>
+          <p:cNvPr id="35" name="Text 33"/>
+          <p:cNvSpPr/>
+          <p:nvPr/>
+        </p:nvSpPr>
+        <p:spPr>
+          <a:xfrm>
+            <a:off x="4581144" y="3364992"/>
+            <a:ext cx="1225296" cy="475488"/>
           </a:xfrm>
           <a:prstGeom prst="rect">
             <a:avLst/>
@@ -22453,14 +22946,14 @@
       </p:sp>
       <p:sp>
         <p:nvSpPr>
-          <p:cNvPr id="33" name="Text 31"/>
-          <p:cNvSpPr/>
-          <p:nvPr/>
-        </p:nvSpPr>
-        <p:spPr>
-          <a:xfrm>
-            <a:off x="6784848" y="3364992"/>
-            <a:ext cx="73152" cy="475488"/>
+          <p:cNvPr id="36" name="Text 34"/>
+          <p:cNvSpPr/>
+          <p:nvPr/>
+        </p:nvSpPr>
+        <p:spPr>
+          <a:xfrm>
+            <a:off x="5806440" y="3364992"/>
+            <a:ext cx="76200" cy="475488"/>
           </a:xfrm>
           <a:prstGeom prst="rect">
             <a:avLst/>
@@ -22492,14 +22985,14 @@
       </p:sp>
       <p:sp>
         <p:nvSpPr>
-          <p:cNvPr id="34" name="Shape 32"/>
-          <p:cNvSpPr/>
-          <p:nvPr/>
-        </p:nvSpPr>
-        <p:spPr>
-          <a:xfrm>
-            <a:off x="6858000" y="3364992"/>
-            <a:ext cx="1554480" cy="475488"/>
+          <p:cNvPr id="37" name="Shape 35"/>
+          <p:cNvSpPr/>
+          <p:nvPr/>
+        </p:nvSpPr>
+        <p:spPr>
+          <a:xfrm>
+            <a:off x="5882640" y="3364992"/>
+            <a:ext cx="1225296" cy="475488"/>
           </a:xfrm>
           <a:prstGeom prst="rect">
             <a:avLst>
@@ -22519,14 +23012,14 @@
       </p:sp>
       <p:sp>
         <p:nvSpPr>
-          <p:cNvPr id="35" name="Text 33"/>
-          <p:cNvSpPr/>
-          <p:nvPr/>
-        </p:nvSpPr>
-        <p:spPr>
-          <a:xfrm>
-            <a:off x="6858000" y="3364992"/>
-            <a:ext cx="1554480" cy="475488"/>
+          <p:cNvPr id="38" name="Text 36"/>
+          <p:cNvSpPr/>
+          <p:nvPr/>
+        </p:nvSpPr>
+        <p:spPr>
+          <a:xfrm>
+            <a:off x="5882640" y="3364992"/>
+            <a:ext cx="1225296" cy="475488"/>
           </a:xfrm>
           <a:prstGeom prst="rect">
             <a:avLst/>
@@ -22558,7 +23051,112 @@
       </p:sp>
       <p:sp>
         <p:nvSpPr>
-          <p:cNvPr id="36" name="Shape 34"/>
+          <p:cNvPr id="39" name="Text 37"/>
+          <p:cNvSpPr/>
+          <p:nvPr/>
+        </p:nvSpPr>
+        <p:spPr>
+          <a:xfrm>
+            <a:off x="7107936" y="3364992"/>
+            <a:ext cx="76200" cy="475488"/>
+          </a:xfrm>
+          <a:prstGeom prst="rect">
+            <a:avLst/>
+          </a:prstGeom>
+          <a:noFill/>
+          <a:ln/>
+        </p:spPr>
+        <p:txBody>
+          <a:bodyPr wrap="square" lIns="0" tIns="0" rIns="0" bIns="0" rtlCol="0" anchor="ctr"/>
+          <a:lstStyle/>
+          <a:p>
+            <a:pPr algn="ctr" indent="0" marL="0">
+              <a:buNone/>
+            </a:pPr>
+            <a:r>
+              <a:rPr lang="en-US" sz="1600" b="1" dirty="0">
+                <a:solidFill>
+                  <a:srgbClr val="0D9488"/>
+                </a:solidFill>
+                <a:latin typeface="Trebuchet MS" pitchFamily="34" charset="0"/>
+                <a:ea typeface="Trebuchet MS" pitchFamily="34" charset="-122"/>
+                <a:cs typeface="Trebuchet MS" pitchFamily="34" charset="-120"/>
+              </a:rPr>
+              <a:t>·</a:t>
+            </a:r>
+            <a:endParaRPr lang="en-US" sz="1600" dirty="0"/>
+          </a:p>
+        </p:txBody>
+      </p:sp>
+      <p:sp>
+        <p:nvSpPr>
+          <p:cNvPr id="40" name="Shape 38"/>
+          <p:cNvSpPr/>
+          <p:nvPr/>
+        </p:nvSpPr>
+        <p:spPr>
+          <a:xfrm>
+            <a:off x="7184136" y="3364992"/>
+            <a:ext cx="1225296" cy="475488"/>
+          </a:xfrm>
+          <a:prstGeom prst="rect">
+            <a:avLst>
+              <a:gd name="adj" fmla="val 9615"/>
+            </a:avLst>
+          </a:prstGeom>
+          <a:solidFill>
+            <a:srgbClr val="FFFFFF"/>
+          </a:solidFill>
+          <a:ln w="12700">
+            <a:solidFill>
+              <a:srgbClr val="0D9488"/>
+            </a:solidFill>
+            <a:prstDash val="solid"/>
+          </a:ln>
+        </p:spPr>
+      </p:sp>
+      <p:sp>
+        <p:nvSpPr>
+          <p:cNvPr id="41" name="Text 39"/>
+          <p:cNvSpPr/>
+          <p:nvPr/>
+        </p:nvSpPr>
+        <p:spPr>
+          <a:xfrm>
+            <a:off x="7184136" y="3364992"/>
+            <a:ext cx="1225296" cy="475488"/>
+          </a:xfrm>
+          <a:prstGeom prst="rect">
+            <a:avLst/>
+          </a:prstGeom>
+          <a:noFill/>
+          <a:ln/>
+        </p:spPr>
+        <p:txBody>
+          <a:bodyPr wrap="square" lIns="0" tIns="0" rIns="0" bIns="0" rtlCol="0" anchor="ctr"/>
+          <a:lstStyle/>
+          <a:p>
+            <a:pPr algn="ctr" indent="0" marL="0">
+              <a:buNone/>
+            </a:pPr>
+            <a:r>
+              <a:rPr lang="en-US" sz="1400" b="1" dirty="0">
+                <a:solidFill>
+                  <a:srgbClr val="0D9488"/>
+                </a:solidFill>
+                <a:latin typeface="Trebuchet MS" pitchFamily="34" charset="0"/>
+                <a:ea typeface="Trebuchet MS" pitchFamily="34" charset="-122"/>
+                <a:cs typeface="Trebuchet MS" pitchFamily="34" charset="-120"/>
+              </a:rPr>
+              <a:t>ly</a:t>
+            </a:r>
+            <a:endParaRPr lang="en-US" sz="1400" dirty="0"/>
+          </a:p>
+        </p:txBody>
+      </p:sp>
+      <p:sp>
+        <p:nvSpPr>
+          <p:cNvPr id="42" name="Shape 40"/>
           <p:cNvSpPr/>
           <p:nvPr/>
         </p:nvSpPr>
@@ -22585,7 +23183,7 @@
       </p:sp>
       <p:sp>
         <p:nvSpPr>
-          <p:cNvPr id="37" name="Text 35"/>
+          <p:cNvPr id="43" name="Text 41"/>
           <p:cNvSpPr/>
           <p:nvPr/>
         </p:nvSpPr>
@@ -22624,7 +23222,7 @@
       </p:sp>
       <p:sp>
         <p:nvSpPr>
-          <p:cNvPr id="38" name="Shape 36"/>
+          <p:cNvPr id="44" name="Shape 42"/>
           <p:cNvSpPr/>
           <p:nvPr/>
         </p:nvSpPr>
@@ -22651,13 +23249,13 @@
       </p:sp>
       <p:sp>
         <p:nvSpPr>
-          <p:cNvPr id="39" name="Shape 37"/>
-          <p:cNvSpPr/>
-          <p:nvPr/>
-        </p:nvSpPr>
-        <p:spPr>
-          <a:xfrm>
-            <a:off x="2254649" y="4169664"/>
+          <p:cNvPr id="45" name="Shape 43"/>
+          <p:cNvSpPr/>
+          <p:nvPr/>
+        </p:nvSpPr>
+        <p:spPr>
+          <a:xfrm>
+            <a:off x="2023872" y="4169664"/>
             <a:ext cx="685800" cy="384048"/>
           </a:xfrm>
           <a:prstGeom prst="rect">
@@ -22678,13 +23276,13 @@
       </p:sp>
       <p:sp>
         <p:nvSpPr>
-          <p:cNvPr id="40" name="Text 38"/>
-          <p:cNvSpPr/>
-          <p:nvPr/>
-        </p:nvSpPr>
-        <p:spPr>
-          <a:xfrm>
-            <a:off x="2254649" y="4169664"/>
+          <p:cNvPr id="46" name="Text 44"/>
+          <p:cNvSpPr/>
+          <p:nvPr/>
+        </p:nvSpPr>
+        <p:spPr>
+          <a:xfrm>
+            <a:off x="2023872" y="4169664"/>
             <a:ext cx="685800" cy="384048"/>
           </a:xfrm>
           <a:prstGeom prst="rect">
@@ -22717,13 +23315,13 @@
       </p:sp>
       <p:sp>
         <p:nvSpPr>
-          <p:cNvPr id="41" name="Shape 39"/>
-          <p:cNvSpPr/>
-          <p:nvPr/>
-        </p:nvSpPr>
-        <p:spPr>
-          <a:xfrm>
-            <a:off x="3293146" y="4169664"/>
+          <p:cNvPr id="47" name="Shape 45"/>
+          <p:cNvSpPr/>
+          <p:nvPr/>
+        </p:nvSpPr>
+        <p:spPr>
+          <a:xfrm>
+            <a:off x="2831592" y="4169664"/>
             <a:ext cx="685800" cy="384048"/>
           </a:xfrm>
           <a:prstGeom prst="rect">
@@ -22744,13 +23342,13 @@
       </p:sp>
       <p:sp>
         <p:nvSpPr>
-          <p:cNvPr id="42" name="Text 40"/>
-          <p:cNvSpPr/>
-          <p:nvPr/>
-        </p:nvSpPr>
-        <p:spPr>
-          <a:xfrm>
-            <a:off x="3293146" y="4169664"/>
+          <p:cNvPr id="48" name="Text 46"/>
+          <p:cNvSpPr/>
+          <p:nvPr/>
+        </p:nvSpPr>
+        <p:spPr>
+          <a:xfrm>
+            <a:off x="2831592" y="4169664"/>
             <a:ext cx="685800" cy="384048"/>
           </a:xfrm>
           <a:prstGeom prst="rect">
@@ -22783,13 +23381,13 @@
       </p:sp>
       <p:sp>
         <p:nvSpPr>
-          <p:cNvPr id="43" name="Shape 41"/>
-          <p:cNvSpPr/>
-          <p:nvPr/>
-        </p:nvSpPr>
-        <p:spPr>
-          <a:xfrm>
-            <a:off x="4331643" y="4169664"/>
+          <p:cNvPr id="49" name="Shape 47"/>
+          <p:cNvSpPr/>
+          <p:nvPr/>
+        </p:nvSpPr>
+        <p:spPr>
+          <a:xfrm>
+            <a:off x="3639312" y="4169664"/>
             <a:ext cx="685800" cy="384048"/>
           </a:xfrm>
           <a:prstGeom prst="rect">
@@ -22810,13 +23408,13 @@
       </p:sp>
       <p:sp>
         <p:nvSpPr>
-          <p:cNvPr id="44" name="Text 42"/>
-          <p:cNvSpPr/>
-          <p:nvPr/>
-        </p:nvSpPr>
-        <p:spPr>
-          <a:xfrm>
-            <a:off x="4331643" y="4169664"/>
+          <p:cNvPr id="50" name="Text 48"/>
+          <p:cNvSpPr/>
+          <p:nvPr/>
+        </p:nvSpPr>
+        <p:spPr>
+          <a:xfrm>
+            <a:off x="3639312" y="4169664"/>
             <a:ext cx="685800" cy="384048"/>
           </a:xfrm>
           <a:prstGeom prst="rect">
@@ -22849,13 +23447,13 @@
       </p:sp>
       <p:sp>
         <p:nvSpPr>
-          <p:cNvPr id="45" name="Shape 43"/>
-          <p:cNvSpPr/>
-          <p:nvPr/>
-        </p:nvSpPr>
-        <p:spPr>
-          <a:xfrm>
-            <a:off x="5370141" y="4169664"/>
+          <p:cNvPr id="51" name="Shape 49"/>
+          <p:cNvSpPr/>
+          <p:nvPr/>
+        </p:nvSpPr>
+        <p:spPr>
+          <a:xfrm>
+            <a:off x="4447032" y="4169664"/>
             <a:ext cx="685800" cy="384048"/>
           </a:xfrm>
           <a:prstGeom prst="rect">
@@ -22876,13 +23474,13 @@
       </p:sp>
       <p:sp>
         <p:nvSpPr>
-          <p:cNvPr id="46" name="Text 44"/>
-          <p:cNvSpPr/>
-          <p:nvPr/>
-        </p:nvSpPr>
-        <p:spPr>
-          <a:xfrm>
-            <a:off x="5370141" y="4169664"/>
+          <p:cNvPr id="52" name="Text 50"/>
+          <p:cNvSpPr/>
+          <p:nvPr/>
+        </p:nvSpPr>
+        <p:spPr>
+          <a:xfrm>
+            <a:off x="4447032" y="4169664"/>
             <a:ext cx="685800" cy="384048"/>
           </a:xfrm>
           <a:prstGeom prst="rect">
@@ -22915,13 +23513,13 @@
       </p:sp>
       <p:sp>
         <p:nvSpPr>
-          <p:cNvPr id="47" name="Text 45"/>
-          <p:cNvSpPr/>
-          <p:nvPr/>
-        </p:nvSpPr>
-        <p:spPr>
-          <a:xfrm>
-            <a:off x="5370141" y="4572000"/>
+          <p:cNvPr id="53" name="Text 51"/>
+          <p:cNvSpPr/>
+          <p:nvPr/>
+        </p:nvSpPr>
+        <p:spPr>
+          <a:xfrm>
+            <a:off x="4447032" y="4572000"/>
             <a:ext cx="685800" cy="219456"/>
           </a:xfrm>
           <a:prstGeom prst="rect">
@@ -22954,13 +23552,13 @@
       </p:sp>
       <p:sp>
         <p:nvSpPr>
-          <p:cNvPr id="48" name="Shape 46"/>
-          <p:cNvSpPr/>
-          <p:nvPr/>
-        </p:nvSpPr>
-        <p:spPr>
-          <a:xfrm>
-            <a:off x="6408638" y="4169664"/>
+          <p:cNvPr id="54" name="Shape 52"/>
+          <p:cNvSpPr/>
+          <p:nvPr/>
+        </p:nvSpPr>
+        <p:spPr>
+          <a:xfrm>
+            <a:off x="5254752" y="4169664"/>
             <a:ext cx="685800" cy="384048"/>
           </a:xfrm>
           <a:prstGeom prst="rect">
@@ -22981,13 +23579,13 @@
       </p:sp>
       <p:sp>
         <p:nvSpPr>
-          <p:cNvPr id="49" name="Text 47"/>
-          <p:cNvSpPr/>
-          <p:nvPr/>
-        </p:nvSpPr>
-        <p:spPr>
-          <a:xfrm>
-            <a:off x="6408638" y="4169664"/>
+          <p:cNvPr id="55" name="Text 53"/>
+          <p:cNvSpPr/>
+          <p:nvPr/>
+        </p:nvSpPr>
+        <p:spPr>
+          <a:xfrm>
+            <a:off x="5254752" y="4169664"/>
             <a:ext cx="685800" cy="384048"/>
           </a:xfrm>
           <a:prstGeom prst="rect">
@@ -23020,13 +23618,13 @@
       </p:sp>
       <p:sp>
         <p:nvSpPr>
-          <p:cNvPr id="50" name="Shape 48"/>
-          <p:cNvSpPr/>
-          <p:nvPr/>
-        </p:nvSpPr>
-        <p:spPr>
-          <a:xfrm>
-            <a:off x="7447135" y="4169664"/>
+          <p:cNvPr id="56" name="Shape 54"/>
+          <p:cNvSpPr/>
+          <p:nvPr/>
+        </p:nvSpPr>
+        <p:spPr>
+          <a:xfrm>
+            <a:off x="6062472" y="4169664"/>
             <a:ext cx="685800" cy="384048"/>
           </a:xfrm>
           <a:prstGeom prst="rect">
@@ -23047,13 +23645,13 @@
       </p:sp>
       <p:sp>
         <p:nvSpPr>
-          <p:cNvPr id="51" name="Text 49"/>
-          <p:cNvSpPr/>
-          <p:nvPr/>
-        </p:nvSpPr>
-        <p:spPr>
-          <a:xfrm>
-            <a:off x="7447135" y="4169664"/>
+          <p:cNvPr id="57" name="Text 55"/>
+          <p:cNvSpPr/>
+          <p:nvPr/>
+        </p:nvSpPr>
+        <p:spPr>
+          <a:xfrm>
+            <a:off x="6062472" y="4169664"/>
             <a:ext cx="685800" cy="384048"/>
           </a:xfrm>
           <a:prstGeom prst="rect">
@@ -23079,6 +23677,138 @@
                 <a:cs typeface="Trebuchet MS" pitchFamily="34" charset="-120"/>
               </a:rPr>
               <a:t>al</a:t>
+            </a:r>
+            <a:endParaRPr lang="en-US" sz="900" dirty="0"/>
+          </a:p>
+        </p:txBody>
+      </p:sp>
+      <p:sp>
+        <p:nvSpPr>
+          <p:cNvPr id="58" name="Shape 56"/>
+          <p:cNvSpPr/>
+          <p:nvPr/>
+        </p:nvSpPr>
+        <p:spPr>
+          <a:xfrm>
+            <a:off x="6870192" y="4169664"/>
+            <a:ext cx="685800" cy="384048"/>
+          </a:xfrm>
+          <a:prstGeom prst="rect">
+            <a:avLst>
+              <a:gd name="adj" fmla="val 9524"/>
+            </a:avLst>
+          </a:prstGeom>
+          <a:solidFill>
+            <a:srgbClr val="FFFFFF"/>
+          </a:solidFill>
+          <a:ln w="12700">
+            <a:solidFill>
+              <a:srgbClr val="DB2777"/>
+            </a:solidFill>
+            <a:prstDash val="solid"/>
+          </a:ln>
+        </p:spPr>
+      </p:sp>
+      <p:sp>
+        <p:nvSpPr>
+          <p:cNvPr id="59" name="Text 57"/>
+          <p:cNvSpPr/>
+          <p:nvPr/>
+        </p:nvSpPr>
+        <p:spPr>
+          <a:xfrm>
+            <a:off x="6870192" y="4169664"/>
+            <a:ext cx="685800" cy="384048"/>
+          </a:xfrm>
+          <a:prstGeom prst="rect">
+            <a:avLst/>
+          </a:prstGeom>
+          <a:noFill/>
+          <a:ln/>
+        </p:spPr>
+        <p:txBody>
+          <a:bodyPr wrap="square" lIns="0" tIns="0" rIns="0" bIns="0" rtlCol="0" anchor="ctr"/>
+          <a:lstStyle/>
+          <a:p>
+            <a:pPr algn="ctr" indent="0" marL="0">
+              <a:buNone/>
+            </a:pPr>
+            <a:r>
+              <a:rPr lang="en-US" sz="900" b="1" dirty="0">
+                <a:solidFill>
+                  <a:srgbClr val="9D174D"/>
+                </a:solidFill>
+                <a:latin typeface="Trebuchet MS" pitchFamily="34" charset="0"/>
+                <a:ea typeface="Trebuchet MS" pitchFamily="34" charset="-122"/>
+                <a:cs typeface="Trebuchet MS" pitchFamily="34" charset="-120"/>
+              </a:rPr>
+              <a:t>l</a:t>
+            </a:r>
+            <a:endParaRPr lang="en-US" sz="900" dirty="0"/>
+          </a:p>
+        </p:txBody>
+      </p:sp>
+      <p:sp>
+        <p:nvSpPr>
+          <p:cNvPr id="60" name="Shape 58"/>
+          <p:cNvSpPr/>
+          <p:nvPr/>
+        </p:nvSpPr>
+        <p:spPr>
+          <a:xfrm>
+            <a:off x="7677912" y="4169664"/>
+            <a:ext cx="685800" cy="384048"/>
+          </a:xfrm>
+          <a:prstGeom prst="rect">
+            <a:avLst>
+              <a:gd name="adj" fmla="val 9524"/>
+            </a:avLst>
+          </a:prstGeom>
+          <a:solidFill>
+            <a:srgbClr val="FFFFFF"/>
+          </a:solidFill>
+          <a:ln w="12700">
+            <a:solidFill>
+              <a:srgbClr val="DB2777"/>
+            </a:solidFill>
+            <a:prstDash val="solid"/>
+          </a:ln>
+        </p:spPr>
+      </p:sp>
+      <p:sp>
+        <p:nvSpPr>
+          <p:cNvPr id="61" name="Text 59"/>
+          <p:cNvSpPr/>
+          <p:nvPr/>
+        </p:nvSpPr>
+        <p:spPr>
+          <a:xfrm>
+            <a:off x="7677912" y="4169664"/>
+            <a:ext cx="685800" cy="384048"/>
+          </a:xfrm>
+          <a:prstGeom prst="rect">
+            <a:avLst/>
+          </a:prstGeom>
+          <a:noFill/>
+          <a:ln/>
+        </p:spPr>
+        <p:txBody>
+          <a:bodyPr wrap="square" lIns="0" tIns="0" rIns="0" bIns="0" rtlCol="0" anchor="ctr"/>
+          <a:lstStyle/>
+          <a:p>
+            <a:pPr algn="ctr" indent="0" marL="0">
+              <a:buNone/>
+            </a:pPr>
+            <a:r>
+              <a:rPr lang="en-US" sz="900" b="1" dirty="0">
+                <a:solidFill>
+                  <a:srgbClr val="9D174D"/>
+                </a:solidFill>
+                <a:latin typeface="Trebuchet MS" pitchFamily="34" charset="0"/>
+                <a:ea typeface="Trebuchet MS" pitchFamily="34" charset="-122"/>
+                <a:cs typeface="Trebuchet MS" pitchFamily="34" charset="-120"/>
+              </a:rPr>
+              <a:t>y</a:t>
             </a:r>
             <a:endParaRPr lang="en-US" sz="900" dirty="0"/>
           </a:p>
@@ -23509,7 +24239,7 @@
                 <a:ea typeface="Trebuchet MS" pitchFamily="34" charset="-122"/>
                 <a:cs typeface="Trebuchet MS" pitchFamily="34" charset="-120"/>
               </a:rPr>
-              <a:t>usually</a:t>
+              <a:t>unusual</a:t>
             </a:r>
             <a:endParaRPr lang="en-US" sz="2800" dirty="0"/>
           </a:p>
@@ -24336,7 +25066,7 @@
                 <a:ea typeface="Trebuchet MS" pitchFamily="34" charset="-122"/>
                 <a:cs typeface="Trebuchet MS" pitchFamily="34" charset="-120"/>
               </a:rPr>
-              <a:t>usually</a:t>
+              <a:t>unusual</a:t>
             </a:r>
             <a:endParaRPr lang="en-US" sz="2800" dirty="0"/>
           </a:p>
@@ -24425,11 +25155,11 @@
             </a:avLst>
           </a:prstGeom>
           <a:solidFill>
-            <a:srgbClr val="CCFBF1"/>
+            <a:srgbClr val="DDD6FE"/>
           </a:solidFill>
           <a:ln w="19050">
             <a:solidFill>
-              <a:srgbClr val="0D9488"/>
+              <a:srgbClr val="7C3AED"/>
             </a:solidFill>
             <a:prstDash val="solid"/>
           </a:ln>
@@ -24469,13 +25199,13 @@
             <a:r>
               <a:rPr lang="en-US" sz="1300" b="1" dirty="0">
                 <a:solidFill>
-                  <a:srgbClr val="0F766E"/>
+                  <a:srgbClr val="4C1D95"/>
                 </a:solidFill>
                 <a:latin typeface="Trebuchet MS" pitchFamily="34" charset="0"/>
                 <a:ea typeface="Trebuchet MS" pitchFamily="34" charset="-122"/>
                 <a:cs typeface="Trebuchet MS" pitchFamily="34" charset="-120"/>
               </a:rPr>
-              <a:t>usual</a:t>
+              <a:t>un</a:t>
             </a:r>
             <a:endParaRPr lang="en-US" sz="1300" dirty="0"/>
           </a:p>
@@ -24514,7 +25244,7 @@
                 <a:ea typeface="Calibri" pitchFamily="34" charset="-122"/>
                 <a:cs typeface="Calibri" pitchFamily="34" charset="-120"/>
               </a:rPr>
-              <a:t>normal or customary</a:t>
+              <a:t>not</a:t>
             </a:r>
             <a:endParaRPr lang="en-US" sz="850" dirty="0"/>
           </a:p>
@@ -24537,11 +25267,11 @@
             </a:avLst>
           </a:prstGeom>
           <a:solidFill>
-            <a:srgbClr val="FCE7F3"/>
+            <a:srgbClr val="CCFBF1"/>
           </a:solidFill>
           <a:ln w="19050">
             <a:solidFill>
-              <a:srgbClr val="DB2777"/>
+              <a:srgbClr val="0D9488"/>
             </a:solidFill>
             <a:prstDash val="solid"/>
           </a:ln>
@@ -24581,13 +25311,13 @@
             <a:r>
               <a:rPr lang="en-US" sz="1300" b="1" dirty="0">
                 <a:solidFill>
-                  <a:srgbClr val="9D174D"/>
+                  <a:srgbClr val="0F766E"/>
                 </a:solidFill>
                 <a:latin typeface="Trebuchet MS" pitchFamily="34" charset="0"/>
                 <a:ea typeface="Trebuchet MS" pitchFamily="34" charset="-122"/>
                 <a:cs typeface="Trebuchet MS" pitchFamily="34" charset="-120"/>
               </a:rPr>
-              <a:t>ly</a:t>
+              <a:t>usual</a:t>
             </a:r>
             <a:endParaRPr lang="en-US" sz="1300" dirty="0"/>
           </a:p>
@@ -24626,7 +25356,7 @@
                 <a:ea typeface="Calibri" pitchFamily="34" charset="-122"/>
                 <a:cs typeface="Calibri" pitchFamily="34" charset="-120"/>
               </a:rPr>
-              <a:t>in a certain way</a:t>
+              <a:t>normal or customary</a:t>
             </a:r>
             <a:endParaRPr lang="en-US" sz="850" dirty="0"/>
           </a:p>
@@ -26040,7 +26770,7 @@
                 <a:ea typeface="Trebuchet MS" pitchFamily="34" charset="-122"/>
                 <a:cs typeface="Trebuchet MS" pitchFamily="34" charset="-120"/>
               </a:rPr>
-              <a:t>usually</a:t>
+              <a:t>unusual</a:t>
             </a:r>
             <a:endParaRPr lang="en-US" sz="2800" dirty="0"/>
           </a:p>
@@ -26129,11 +26859,11 @@
             </a:avLst>
           </a:prstGeom>
           <a:solidFill>
-            <a:srgbClr val="CCFBF1"/>
+            <a:srgbClr val="DDD6FE"/>
           </a:solidFill>
           <a:ln w="19050">
             <a:solidFill>
-              <a:srgbClr val="0D9488"/>
+              <a:srgbClr val="7C3AED"/>
             </a:solidFill>
             <a:prstDash val="solid"/>
           </a:ln>
@@ -26173,13 +26903,13 @@
             <a:r>
               <a:rPr lang="en-US" sz="1300" b="1" dirty="0">
                 <a:solidFill>
-                  <a:srgbClr val="0F766E"/>
+                  <a:srgbClr val="4C1D95"/>
                 </a:solidFill>
                 <a:latin typeface="Trebuchet MS" pitchFamily="34" charset="0"/>
                 <a:ea typeface="Trebuchet MS" pitchFamily="34" charset="-122"/>
                 <a:cs typeface="Trebuchet MS" pitchFamily="34" charset="-120"/>
               </a:rPr>
-              <a:t>usual</a:t>
+              <a:t>un</a:t>
             </a:r>
             <a:endParaRPr lang="en-US" sz="1300" dirty="0"/>
           </a:p>
@@ -26218,7 +26948,7 @@
                 <a:ea typeface="Calibri" pitchFamily="34" charset="-122"/>
                 <a:cs typeface="Calibri" pitchFamily="34" charset="-120"/>
               </a:rPr>
-              <a:t>normal or customary</a:t>
+              <a:t>not</a:t>
             </a:r>
             <a:endParaRPr lang="en-US" sz="850" dirty="0"/>
           </a:p>
@@ -26241,11 +26971,11 @@
             </a:avLst>
           </a:prstGeom>
           <a:solidFill>
-            <a:srgbClr val="FCE7F3"/>
+            <a:srgbClr val="CCFBF1"/>
           </a:solidFill>
           <a:ln w="19050">
             <a:solidFill>
-              <a:srgbClr val="DB2777"/>
+              <a:srgbClr val="0D9488"/>
             </a:solidFill>
             <a:prstDash val="solid"/>
           </a:ln>
@@ -26285,13 +27015,13 @@
             <a:r>
               <a:rPr lang="en-US" sz="1300" b="1" dirty="0">
                 <a:solidFill>
-                  <a:srgbClr val="9D174D"/>
+                  <a:srgbClr val="0F766E"/>
                 </a:solidFill>
                 <a:latin typeface="Trebuchet MS" pitchFamily="34" charset="0"/>
                 <a:ea typeface="Trebuchet MS" pitchFamily="34" charset="-122"/>
                 <a:cs typeface="Trebuchet MS" pitchFamily="34" charset="-120"/>
               </a:rPr>
-              <a:t>ly</a:t>
+              <a:t>usual</a:t>
             </a:r>
             <a:endParaRPr lang="en-US" sz="1300" dirty="0"/>
           </a:p>
@@ -26330,7 +27060,7 @@
                 <a:ea typeface="Calibri" pitchFamily="34" charset="-122"/>
                 <a:cs typeface="Calibri" pitchFamily="34" charset="-120"/>
               </a:rPr>
-              <a:t>in a certain way</a:t>
+              <a:t>normal or customary</a:t>
             </a:r>
             <a:endParaRPr lang="en-US" sz="850" dirty="0"/>
           </a:p>
@@ -26489,7 +27219,7 @@
                 <a:ea typeface="Trebuchet MS" pitchFamily="34" charset="-122"/>
                 <a:cs typeface="Trebuchet MS" pitchFamily="34" charset="-120"/>
               </a:rPr>
-              <a:t>u</a:t>
+              <a:t>un</a:t>
             </a:r>
             <a:endParaRPr lang="en-US" sz="1400" dirty="0"/>
           </a:p>
@@ -26594,7 +27324,7 @@
                 <a:ea typeface="Trebuchet MS" pitchFamily="34" charset="-122"/>
                 <a:cs typeface="Trebuchet MS" pitchFamily="34" charset="-120"/>
               </a:rPr>
-              <a:t>su</a:t>
+              <a:t>u</a:t>
             </a:r>
             <a:endParaRPr lang="en-US" sz="1400" dirty="0"/>
           </a:p>
@@ -26699,7 +27429,7 @@
                 <a:ea typeface="Trebuchet MS" pitchFamily="34" charset="-122"/>
                 <a:cs typeface="Trebuchet MS" pitchFamily="34" charset="-120"/>
               </a:rPr>
-              <a:t>al</a:t>
+              <a:t>su</a:t>
             </a:r>
             <a:endParaRPr lang="en-US" sz="1400" dirty="0"/>
           </a:p>
@@ -26804,7 +27534,7 @@
                 <a:ea typeface="Trebuchet MS" pitchFamily="34" charset="-122"/>
                 <a:cs typeface="Trebuchet MS" pitchFamily="34" charset="-120"/>
               </a:rPr>
-              <a:t>ly</a:t>
+              <a:t>al</a:t>
             </a:r>
             <a:endParaRPr lang="en-US" sz="1400" dirty="0"/>
           </a:p>
@@ -27367,7 +28097,7 @@
                 <a:ea typeface="Trebuchet MS" pitchFamily="34" charset="-122"/>
                 <a:cs typeface="Trebuchet MS" pitchFamily="34" charset="-120"/>
               </a:rPr>
-              <a:t>usually</a:t>
+              <a:t>unusual</a:t>
             </a:r>
             <a:endParaRPr lang="en-US" sz="2800" dirty="0"/>
           </a:p>
@@ -27456,11 +28186,11 @@
             </a:avLst>
           </a:prstGeom>
           <a:solidFill>
-            <a:srgbClr val="CCFBF1"/>
+            <a:srgbClr val="DDD6FE"/>
           </a:solidFill>
           <a:ln w="19050">
             <a:solidFill>
-              <a:srgbClr val="0D9488"/>
+              <a:srgbClr val="7C3AED"/>
             </a:solidFill>
             <a:prstDash val="solid"/>
           </a:ln>
@@ -27500,13 +28230,13 @@
             <a:r>
               <a:rPr lang="en-US" sz="1300" b="1" dirty="0">
                 <a:solidFill>
-                  <a:srgbClr val="0F766E"/>
+                  <a:srgbClr val="4C1D95"/>
                 </a:solidFill>
                 <a:latin typeface="Trebuchet MS" pitchFamily="34" charset="0"/>
                 <a:ea typeface="Trebuchet MS" pitchFamily="34" charset="-122"/>
                 <a:cs typeface="Trebuchet MS" pitchFamily="34" charset="-120"/>
               </a:rPr>
-              <a:t>usual</a:t>
+              <a:t>un</a:t>
             </a:r>
             <a:endParaRPr lang="en-US" sz="1300" dirty="0"/>
           </a:p>
@@ -27545,7 +28275,7 @@
                 <a:ea typeface="Calibri" pitchFamily="34" charset="-122"/>
                 <a:cs typeface="Calibri" pitchFamily="34" charset="-120"/>
               </a:rPr>
-              <a:t>normal or customary</a:t>
+              <a:t>not</a:t>
             </a:r>
             <a:endParaRPr lang="en-US" sz="850" dirty="0"/>
           </a:p>
@@ -27568,11 +28298,11 @@
             </a:avLst>
           </a:prstGeom>
           <a:solidFill>
-            <a:srgbClr val="FCE7F3"/>
+            <a:srgbClr val="CCFBF1"/>
           </a:solidFill>
           <a:ln w="19050">
             <a:solidFill>
-              <a:srgbClr val="DB2777"/>
+              <a:srgbClr val="0D9488"/>
             </a:solidFill>
             <a:prstDash val="solid"/>
           </a:ln>
@@ -27612,13 +28342,13 @@
             <a:r>
               <a:rPr lang="en-US" sz="1300" b="1" dirty="0">
                 <a:solidFill>
-                  <a:srgbClr val="9D174D"/>
+                  <a:srgbClr val="0F766E"/>
                 </a:solidFill>
                 <a:latin typeface="Trebuchet MS" pitchFamily="34" charset="0"/>
                 <a:ea typeface="Trebuchet MS" pitchFamily="34" charset="-122"/>
                 <a:cs typeface="Trebuchet MS" pitchFamily="34" charset="-120"/>
               </a:rPr>
-              <a:t>ly</a:t>
+              <a:t>usual</a:t>
             </a:r>
             <a:endParaRPr lang="en-US" sz="1300" dirty="0"/>
           </a:p>
@@ -27657,7 +28387,7 @@
                 <a:ea typeface="Calibri" pitchFamily="34" charset="-122"/>
                 <a:cs typeface="Calibri" pitchFamily="34" charset="-120"/>
               </a:rPr>
-              <a:t>in a certain way</a:t>
+              <a:t>normal or customary</a:t>
             </a:r>
             <a:endParaRPr lang="en-US" sz="850" dirty="0"/>
           </a:p>
@@ -27816,7 +28546,7 @@
                 <a:ea typeface="Trebuchet MS" pitchFamily="34" charset="-122"/>
                 <a:cs typeface="Trebuchet MS" pitchFamily="34" charset="-120"/>
               </a:rPr>
-              <a:t>u</a:t>
+              <a:t>un</a:t>
             </a:r>
             <a:endParaRPr lang="en-US" sz="1400" dirty="0"/>
           </a:p>
@@ -27921,7 +28651,7 @@
                 <a:ea typeface="Trebuchet MS" pitchFamily="34" charset="-122"/>
                 <a:cs typeface="Trebuchet MS" pitchFamily="34" charset="-120"/>
               </a:rPr>
-              <a:t>su</a:t>
+              <a:t>u</a:t>
             </a:r>
             <a:endParaRPr lang="en-US" sz="1400" dirty="0"/>
           </a:p>
@@ -28026,7 +28756,7 @@
                 <a:ea typeface="Trebuchet MS" pitchFamily="34" charset="-122"/>
                 <a:cs typeface="Trebuchet MS" pitchFamily="34" charset="-120"/>
               </a:rPr>
-              <a:t>al</a:t>
+              <a:t>su</a:t>
             </a:r>
             <a:endParaRPr lang="en-US" sz="1400" dirty="0"/>
           </a:p>
@@ -28131,7 +28861,7 @@
                 <a:ea typeface="Trebuchet MS" pitchFamily="34" charset="-122"/>
                 <a:cs typeface="Trebuchet MS" pitchFamily="34" charset="-120"/>
               </a:rPr>
-              <a:t>ly</a:t>
+              <a:t>al</a:t>
             </a:r>
             <a:endParaRPr lang="en-US" sz="1400" dirty="0"/>
           </a:p>
@@ -28238,7 +28968,7 @@
         </p:nvSpPr>
         <p:spPr>
           <a:xfrm>
-            <a:off x="2427732" y="4169664"/>
+            <a:off x="2254649" y="4169664"/>
             <a:ext cx="685800" cy="384048"/>
           </a:xfrm>
           <a:prstGeom prst="rect">
@@ -28265,7 +28995,7 @@
         </p:nvSpPr>
         <p:spPr>
           <a:xfrm>
-            <a:off x="2427732" y="4169664"/>
+            <a:off x="2254649" y="4169664"/>
             <a:ext cx="685800" cy="384048"/>
           </a:xfrm>
           <a:prstGeom prst="rect">
@@ -28304,7 +29034,7 @@
         </p:nvSpPr>
         <p:spPr>
           <a:xfrm>
-            <a:off x="3639312" y="4169664"/>
+            <a:off x="3293146" y="4169664"/>
             <a:ext cx="685800" cy="384048"/>
           </a:xfrm>
           <a:prstGeom prst="rect">
@@ -28331,7 +29061,7 @@
         </p:nvSpPr>
         <p:spPr>
           <a:xfrm>
-            <a:off x="3639312" y="4169664"/>
+            <a:off x="3293146" y="4169664"/>
             <a:ext cx="685800" cy="384048"/>
           </a:xfrm>
           <a:prstGeom prst="rect">
@@ -28356,6 +29086,138 @@
                 <a:ea typeface="Trebuchet MS" pitchFamily="34" charset="-122"/>
                 <a:cs typeface="Trebuchet MS" pitchFamily="34" charset="-120"/>
               </a:rPr>
+              <a:t>n</a:t>
+            </a:r>
+            <a:endParaRPr lang="en-US" sz="900" dirty="0"/>
+          </a:p>
+        </p:txBody>
+      </p:sp>
+      <p:sp>
+        <p:nvSpPr>
+          <p:cNvPr id="43" name="Shape 41"/>
+          <p:cNvSpPr/>
+          <p:nvPr/>
+        </p:nvSpPr>
+        <p:spPr>
+          <a:xfrm>
+            <a:off x="4331643" y="4169664"/>
+            <a:ext cx="685800" cy="384048"/>
+          </a:xfrm>
+          <a:prstGeom prst="rect">
+            <a:avLst>
+              <a:gd name="adj" fmla="val 9524"/>
+            </a:avLst>
+          </a:prstGeom>
+          <a:solidFill>
+            <a:srgbClr val="FFFFFF"/>
+          </a:solidFill>
+          <a:ln w="12700">
+            <a:solidFill>
+              <a:srgbClr val="DB2777"/>
+            </a:solidFill>
+            <a:prstDash val="solid"/>
+          </a:ln>
+        </p:spPr>
+      </p:sp>
+      <p:sp>
+        <p:nvSpPr>
+          <p:cNvPr id="44" name="Text 42"/>
+          <p:cNvSpPr/>
+          <p:nvPr/>
+        </p:nvSpPr>
+        <p:spPr>
+          <a:xfrm>
+            <a:off x="4331643" y="4169664"/>
+            <a:ext cx="685800" cy="384048"/>
+          </a:xfrm>
+          <a:prstGeom prst="rect">
+            <a:avLst/>
+          </a:prstGeom>
+          <a:noFill/>
+          <a:ln/>
+        </p:spPr>
+        <p:txBody>
+          <a:bodyPr wrap="square" lIns="0" tIns="0" rIns="0" bIns="0" rtlCol="0" anchor="ctr"/>
+          <a:lstStyle/>
+          <a:p>
+            <a:pPr algn="ctr" indent="0" marL="0">
+              <a:buNone/>
+            </a:pPr>
+            <a:r>
+              <a:rPr lang="en-US" sz="900" b="1" dirty="0">
+                <a:solidFill>
+                  <a:srgbClr val="9D174D"/>
+                </a:solidFill>
+                <a:latin typeface="Trebuchet MS" pitchFamily="34" charset="0"/>
+                <a:ea typeface="Trebuchet MS" pitchFamily="34" charset="-122"/>
+                <a:cs typeface="Trebuchet MS" pitchFamily="34" charset="-120"/>
+              </a:rPr>
+              <a:t>u</a:t>
+            </a:r>
+            <a:endParaRPr lang="en-US" sz="900" dirty="0"/>
+          </a:p>
+        </p:txBody>
+      </p:sp>
+      <p:sp>
+        <p:nvSpPr>
+          <p:cNvPr id="45" name="Shape 43"/>
+          <p:cNvSpPr/>
+          <p:nvPr/>
+        </p:nvSpPr>
+        <p:spPr>
+          <a:xfrm>
+            <a:off x="5370141" y="4169664"/>
+            <a:ext cx="685800" cy="384048"/>
+          </a:xfrm>
+          <a:prstGeom prst="rect">
+            <a:avLst>
+              <a:gd name="adj" fmla="val 9524"/>
+            </a:avLst>
+          </a:prstGeom>
+          <a:solidFill>
+            <a:srgbClr val="FFFFFF"/>
+          </a:solidFill>
+          <a:ln w="12700">
+            <a:solidFill>
+              <a:srgbClr val="DB2777"/>
+            </a:solidFill>
+            <a:prstDash val="solid"/>
+          </a:ln>
+        </p:spPr>
+      </p:sp>
+      <p:sp>
+        <p:nvSpPr>
+          <p:cNvPr id="46" name="Text 44"/>
+          <p:cNvSpPr/>
+          <p:nvPr/>
+        </p:nvSpPr>
+        <p:spPr>
+          <a:xfrm>
+            <a:off x="5370141" y="4169664"/>
+            <a:ext cx="685800" cy="384048"/>
+          </a:xfrm>
+          <a:prstGeom prst="rect">
+            <a:avLst/>
+          </a:prstGeom>
+          <a:noFill/>
+          <a:ln/>
+        </p:spPr>
+        <p:txBody>
+          <a:bodyPr wrap="square" lIns="0" tIns="0" rIns="0" bIns="0" rtlCol="0" anchor="ctr"/>
+          <a:lstStyle/>
+          <a:p>
+            <a:pPr algn="ctr" indent="0" marL="0">
+              <a:buNone/>
+            </a:pPr>
+            <a:r>
+              <a:rPr lang="en-US" sz="900" b="1" dirty="0">
+                <a:solidFill>
+                  <a:srgbClr val="9D174D"/>
+                </a:solidFill>
+                <a:latin typeface="Trebuchet MS" pitchFamily="34" charset="0"/>
+                <a:ea typeface="Trebuchet MS" pitchFamily="34" charset="-122"/>
+                <a:cs typeface="Trebuchet MS" pitchFamily="34" charset="-120"/>
+              </a:rPr>
               <a:t>s</a:t>
             </a:r>
             <a:endParaRPr lang="en-US" sz="900" dirty="0"/>
@@ -28364,13 +29226,13 @@
       </p:sp>
       <p:sp>
         <p:nvSpPr>
-          <p:cNvPr id="43" name="Text 41"/>
-          <p:cNvSpPr/>
-          <p:nvPr/>
-        </p:nvSpPr>
-        <p:spPr>
-          <a:xfrm>
-            <a:off x="3639312" y="4572000"/>
+          <p:cNvPr id="47" name="Text 45"/>
+          <p:cNvSpPr/>
+          <p:nvPr/>
+        </p:nvSpPr>
+        <p:spPr>
+          <a:xfrm>
+            <a:off x="5370141" y="4572000"/>
             <a:ext cx="685800" cy="219456"/>
           </a:xfrm>
           <a:prstGeom prst="rect">
@@ -28403,13 +29265,13 @@
       </p:sp>
       <p:sp>
         <p:nvSpPr>
-          <p:cNvPr id="44" name="Shape 42"/>
-          <p:cNvSpPr/>
-          <p:nvPr/>
-        </p:nvSpPr>
-        <p:spPr>
-          <a:xfrm>
-            <a:off x="4850892" y="4169664"/>
+          <p:cNvPr id="48" name="Shape 46"/>
+          <p:cNvSpPr/>
+          <p:nvPr/>
+        </p:nvSpPr>
+        <p:spPr>
+          <a:xfrm>
+            <a:off x="6408638" y="4169664"/>
             <a:ext cx="685800" cy="384048"/>
           </a:xfrm>
           <a:prstGeom prst="rect">
@@ -28430,13 +29292,13 @@
       </p:sp>
       <p:sp>
         <p:nvSpPr>
-          <p:cNvPr id="45" name="Text 43"/>
-          <p:cNvSpPr/>
-          <p:nvPr/>
-        </p:nvSpPr>
-        <p:spPr>
-          <a:xfrm>
-            <a:off x="4850892" y="4169664"/>
+          <p:cNvPr id="49" name="Text 47"/>
+          <p:cNvSpPr/>
+          <p:nvPr/>
+        </p:nvSpPr>
+        <p:spPr>
+          <a:xfrm>
+            <a:off x="6408638" y="4169664"/>
             <a:ext cx="685800" cy="384048"/>
           </a:xfrm>
           <a:prstGeom prst="rect">
@@ -28469,13 +29331,13 @@
       </p:sp>
       <p:sp>
         <p:nvSpPr>
-          <p:cNvPr id="46" name="Shape 44"/>
-          <p:cNvSpPr/>
-          <p:nvPr/>
-        </p:nvSpPr>
-        <p:spPr>
-          <a:xfrm>
-            <a:off x="6062472" y="4169664"/>
+          <p:cNvPr id="50" name="Shape 48"/>
+          <p:cNvSpPr/>
+          <p:nvPr/>
+        </p:nvSpPr>
+        <p:spPr>
+          <a:xfrm>
+            <a:off x="7447135" y="4169664"/>
             <a:ext cx="685800" cy="384048"/>
           </a:xfrm>
           <a:prstGeom prst="rect">
@@ -28496,13 +29358,13 @@
       </p:sp>
       <p:sp>
         <p:nvSpPr>
-          <p:cNvPr id="47" name="Text 45"/>
-          <p:cNvSpPr/>
-          <p:nvPr/>
-        </p:nvSpPr>
-        <p:spPr>
-          <a:xfrm>
-            <a:off x="6062472" y="4169664"/>
+          <p:cNvPr id="51" name="Text 49"/>
+          <p:cNvSpPr/>
+          <p:nvPr/>
+        </p:nvSpPr>
+        <p:spPr>
+          <a:xfrm>
+            <a:off x="7447135" y="4169664"/>
             <a:ext cx="685800" cy="384048"/>
           </a:xfrm>
           <a:prstGeom prst="rect">
@@ -28528,72 +29390,6 @@
                 <a:cs typeface="Trebuchet MS" pitchFamily="34" charset="-120"/>
               </a:rPr>
               <a:t>al</a:t>
-            </a:r>
-            <a:endParaRPr lang="en-US" sz="900" dirty="0"/>
-          </a:p>
-        </p:txBody>
-      </p:sp>
-      <p:sp>
-        <p:nvSpPr>
-          <p:cNvPr id="48" name="Shape 46"/>
-          <p:cNvSpPr/>
-          <p:nvPr/>
-        </p:nvSpPr>
-        <p:spPr>
-          <a:xfrm>
-            <a:off x="7274052" y="4169664"/>
-            <a:ext cx="685800" cy="384048"/>
-          </a:xfrm>
-          <a:prstGeom prst="rect">
-            <a:avLst>
-              <a:gd name="adj" fmla="val 9524"/>
-            </a:avLst>
-          </a:prstGeom>
-          <a:solidFill>
-            <a:srgbClr val="FFFFFF"/>
-          </a:solidFill>
-          <a:ln w="12700">
-            <a:solidFill>
-              <a:srgbClr val="DB2777"/>
-            </a:solidFill>
-            <a:prstDash val="solid"/>
-          </a:ln>
-        </p:spPr>
-      </p:sp>
-      <p:sp>
-        <p:nvSpPr>
-          <p:cNvPr id="49" name="Text 47"/>
-          <p:cNvSpPr/>
-          <p:nvPr/>
-        </p:nvSpPr>
-        <p:spPr>
-          <a:xfrm>
-            <a:off x="7274052" y="4169664"/>
-            <a:ext cx="685800" cy="384048"/>
-          </a:xfrm>
-          <a:prstGeom prst="rect">
-            <a:avLst/>
-          </a:prstGeom>
-          <a:noFill/>
-          <a:ln/>
-        </p:spPr>
-        <p:txBody>
-          <a:bodyPr wrap="square" lIns="0" tIns="0" rIns="0" bIns="0" rtlCol="0" anchor="ctr"/>
-          <a:lstStyle/>
-          <a:p>
-            <a:pPr algn="ctr" indent="0" marL="0">
-              <a:buNone/>
-            </a:pPr>
-            <a:r>
-              <a:rPr lang="en-US" sz="900" b="1" dirty="0">
-                <a:solidFill>
-                  <a:srgbClr val="9D174D"/>
-                </a:solidFill>
-                <a:latin typeface="Trebuchet MS" pitchFamily="34" charset="0"/>
-                <a:ea typeface="Trebuchet MS" pitchFamily="34" charset="-122"/>
-                <a:cs typeface="Trebuchet MS" pitchFamily="34" charset="-120"/>
-              </a:rPr>
-              <a:t>ly</a:t>
             </a:r>
             <a:endParaRPr lang="en-US" sz="900" dirty="0"/>
           </a:p>
@@ -29024,7 +29820,7 @@
                 <a:ea typeface="Trebuchet MS" pitchFamily="34" charset="-122"/>
                 <a:cs typeface="Trebuchet MS" pitchFamily="34" charset="-120"/>
               </a:rPr>
-              <a:t>unusually</a:t>
+              <a:t>unusualness</a:t>
             </a:r>
             <a:endParaRPr lang="en-US" sz="2800" dirty="0"/>
           </a:p>
@@ -29851,7 +30647,7 @@
                 <a:ea typeface="Trebuchet MS" pitchFamily="34" charset="-122"/>
                 <a:cs typeface="Trebuchet MS" pitchFamily="34" charset="-120"/>
               </a:rPr>
-              <a:t>unusually</a:t>
+              <a:t>unusualness</a:t>
             </a:r>
             <a:endParaRPr lang="en-US" sz="2800" dirty="0"/>
           </a:p>
@@ -30214,7 +31010,7 @@
                 <a:ea typeface="Trebuchet MS" pitchFamily="34" charset="-122"/>
                 <a:cs typeface="Trebuchet MS" pitchFamily="34" charset="-120"/>
               </a:rPr>
-              <a:t>ly</a:t>
+              <a:t>ness</a:t>
             </a:r>
             <a:endParaRPr lang="en-US" sz="1300" dirty="0"/>
           </a:p>
@@ -30253,7 +31049,7 @@
                 <a:ea typeface="Calibri" pitchFamily="34" charset="-122"/>
                 <a:cs typeface="Calibri" pitchFamily="34" charset="-120"/>
               </a:rPr>
-              <a:t>in a certain way</a:t>
+              <a:t>the quality of being</a:t>
             </a:r>
             <a:endParaRPr lang="en-US" sz="850" dirty="0"/>
           </a:p>
@@ -30948,7 +31744,7 @@
                 <a:ea typeface="Trebuchet MS" pitchFamily="34" charset="-122"/>
                 <a:cs typeface="Trebuchet MS" pitchFamily="34" charset="-120"/>
               </a:rPr>
-              <a:t>unusually</a:t>
+              <a:t>unusualness</a:t>
             </a:r>
             <a:endParaRPr lang="en-US" sz="2800" dirty="0"/>
           </a:p>
@@ -31311,7 +32107,7 @@
                 <a:ea typeface="Trebuchet MS" pitchFamily="34" charset="-122"/>
                 <a:cs typeface="Trebuchet MS" pitchFamily="34" charset="-120"/>
               </a:rPr>
-              <a:t>ly</a:t>
+              <a:t>ness</a:t>
             </a:r>
             <a:endParaRPr lang="en-US" sz="1300" dirty="0"/>
           </a:p>
@@ -31350,7 +32146,7 @@
                 <a:ea typeface="Calibri" pitchFamily="34" charset="-122"/>
                 <a:cs typeface="Calibri" pitchFamily="34" charset="-120"/>
               </a:rPr>
-              <a:t>in a certain way</a:t>
+              <a:t>the quality of being</a:t>
             </a:r>
             <a:endParaRPr lang="en-US" sz="850" dirty="0"/>
           </a:p>
@@ -31929,7 +32725,7 @@
                 <a:ea typeface="Trebuchet MS" pitchFamily="34" charset="-122"/>
                 <a:cs typeface="Trebuchet MS" pitchFamily="34" charset="-120"/>
               </a:rPr>
-              <a:t>ly</a:t>
+              <a:t>ness</a:t>
             </a:r>
             <a:endParaRPr lang="en-US" sz="1400" dirty="0"/>
           </a:p>
@@ -32492,7 +33288,7 @@
                 <a:ea typeface="Trebuchet MS" pitchFamily="34" charset="-122"/>
                 <a:cs typeface="Trebuchet MS" pitchFamily="34" charset="-120"/>
               </a:rPr>
-              <a:t>unusually</a:t>
+              <a:t>unusualness</a:t>
             </a:r>
             <a:endParaRPr lang="en-US" sz="2800" dirty="0"/>
           </a:p>
@@ -32855,7 +33651,7 @@
                 <a:ea typeface="Trebuchet MS" pitchFamily="34" charset="-122"/>
                 <a:cs typeface="Trebuchet MS" pitchFamily="34" charset="-120"/>
               </a:rPr>
-              <a:t>ly</a:t>
+              <a:t>ness</a:t>
             </a:r>
             <a:endParaRPr lang="en-US" sz="1300" dirty="0"/>
           </a:p>
@@ -32894,7 +33690,7 @@
                 <a:ea typeface="Calibri" pitchFamily="34" charset="-122"/>
                 <a:cs typeface="Calibri" pitchFamily="34" charset="-120"/>
               </a:rPr>
-              <a:t>in a certain way</a:t>
+              <a:t>the quality of being</a:t>
             </a:r>
             <a:endParaRPr lang="en-US" sz="850" dirty="0"/>
           </a:p>
@@ -33473,7 +34269,7 @@
                 <a:ea typeface="Trebuchet MS" pitchFamily="34" charset="-122"/>
                 <a:cs typeface="Trebuchet MS" pitchFamily="34" charset="-120"/>
               </a:rPr>
-              <a:t>ly</a:t>
+              <a:t>ness</a:t>
             </a:r>
             <a:endParaRPr lang="en-US" sz="1400" dirty="0"/>
           </a:p>
@@ -33580,8 +34376,8 @@
         </p:nvSpPr>
         <p:spPr>
           <a:xfrm>
-            <a:off x="2124837" y="4169664"/>
-            <a:ext cx="685800" cy="384048"/>
+            <a:off x="1951330" y="4169664"/>
+            <a:ext cx="676656" cy="384048"/>
           </a:xfrm>
           <a:prstGeom prst="rect">
             <a:avLst>
@@ -33607,8 +34403,8 @@
         </p:nvSpPr>
         <p:spPr>
           <a:xfrm>
-            <a:off x="2124837" y="4169664"/>
-            <a:ext cx="685800" cy="384048"/>
+            <a:off x="1951330" y="4169664"/>
+            <a:ext cx="676656" cy="384048"/>
           </a:xfrm>
           <a:prstGeom prst="rect">
             <a:avLst/>
@@ -33646,8 +34442,8 @@
         </p:nvSpPr>
         <p:spPr>
           <a:xfrm>
-            <a:off x="3033522" y="4169664"/>
-            <a:ext cx="685800" cy="384048"/>
+            <a:off x="2677363" y="4169664"/>
+            <a:ext cx="676656" cy="384048"/>
           </a:xfrm>
           <a:prstGeom prst="rect">
             <a:avLst>
@@ -33673,8 +34469,8 @@
         </p:nvSpPr>
         <p:spPr>
           <a:xfrm>
-            <a:off x="3033522" y="4169664"/>
-            <a:ext cx="685800" cy="384048"/>
+            <a:off x="2677363" y="4169664"/>
+            <a:ext cx="676656" cy="384048"/>
           </a:xfrm>
           <a:prstGeom prst="rect">
             <a:avLst/>
@@ -33712,8 +34508,8 @@
         </p:nvSpPr>
         <p:spPr>
           <a:xfrm>
-            <a:off x="3942207" y="4169664"/>
-            <a:ext cx="685800" cy="384048"/>
+            <a:off x="3403397" y="4169664"/>
+            <a:ext cx="676656" cy="384048"/>
           </a:xfrm>
           <a:prstGeom prst="rect">
             <a:avLst>
@@ -33739,8 +34535,8 @@
         </p:nvSpPr>
         <p:spPr>
           <a:xfrm>
-            <a:off x="3942207" y="4169664"/>
-            <a:ext cx="685800" cy="384048"/>
+            <a:off x="3403397" y="4169664"/>
+            <a:ext cx="676656" cy="384048"/>
           </a:xfrm>
           <a:prstGeom prst="rect">
             <a:avLst/>
@@ -33778,8 +34574,8 @@
         </p:nvSpPr>
         <p:spPr>
           <a:xfrm>
-            <a:off x="4850892" y="4169664"/>
-            <a:ext cx="685800" cy="384048"/>
+            <a:off x="4129430" y="4169664"/>
+            <a:ext cx="676656" cy="384048"/>
           </a:xfrm>
           <a:prstGeom prst="rect">
             <a:avLst>
@@ -33805,8 +34601,8 @@
         </p:nvSpPr>
         <p:spPr>
           <a:xfrm>
-            <a:off x="4850892" y="4169664"/>
-            <a:ext cx="685800" cy="384048"/>
+            <a:off x="4129430" y="4169664"/>
+            <a:ext cx="676656" cy="384048"/>
           </a:xfrm>
           <a:prstGeom prst="rect">
             <a:avLst/>
@@ -33844,8 +34640,8 @@
         </p:nvSpPr>
         <p:spPr>
           <a:xfrm>
-            <a:off x="4850892" y="4572000"/>
-            <a:ext cx="685800" cy="219456"/>
+            <a:off x="4129430" y="4572000"/>
+            <a:ext cx="676656" cy="219456"/>
           </a:xfrm>
           <a:prstGeom prst="rect">
             <a:avLst/>
@@ -33883,8 +34679,8 @@
         </p:nvSpPr>
         <p:spPr>
           <a:xfrm>
-            <a:off x="5759577" y="4169664"/>
-            <a:ext cx="685800" cy="384048"/>
+            <a:off x="4855464" y="4169664"/>
+            <a:ext cx="676656" cy="384048"/>
           </a:xfrm>
           <a:prstGeom prst="rect">
             <a:avLst>
@@ -33910,8 +34706,8 @@
         </p:nvSpPr>
         <p:spPr>
           <a:xfrm>
-            <a:off x="5759577" y="4169664"/>
-            <a:ext cx="685800" cy="384048"/>
+            <a:off x="4855464" y="4169664"/>
+            <a:ext cx="676656" cy="384048"/>
           </a:xfrm>
           <a:prstGeom prst="rect">
             <a:avLst/>
@@ -33949,8 +34745,8 @@
         </p:nvSpPr>
         <p:spPr>
           <a:xfrm>
-            <a:off x="6668262" y="4169664"/>
-            <a:ext cx="685800" cy="384048"/>
+            <a:off x="5581498" y="4169664"/>
+            <a:ext cx="676656" cy="384048"/>
           </a:xfrm>
           <a:prstGeom prst="rect">
             <a:avLst>
@@ -33976,8 +34772,8 @@
         </p:nvSpPr>
         <p:spPr>
           <a:xfrm>
-            <a:off x="6668262" y="4169664"/>
-            <a:ext cx="685800" cy="384048"/>
+            <a:off x="5581498" y="4169664"/>
+            <a:ext cx="676656" cy="384048"/>
           </a:xfrm>
           <a:prstGeom prst="rect">
             <a:avLst/>
@@ -34015,8 +34811,8 @@
         </p:nvSpPr>
         <p:spPr>
           <a:xfrm>
-            <a:off x="7576947" y="4169664"/>
-            <a:ext cx="685800" cy="384048"/>
+            <a:off x="6307531" y="4169664"/>
+            <a:ext cx="676656" cy="384048"/>
           </a:xfrm>
           <a:prstGeom prst="rect">
             <a:avLst>
@@ -34042,8 +34838,8 @@
         </p:nvSpPr>
         <p:spPr>
           <a:xfrm>
-            <a:off x="7576947" y="4169664"/>
-            <a:ext cx="685800" cy="384048"/>
+            <a:off x="6307531" y="4169664"/>
+            <a:ext cx="676656" cy="384048"/>
           </a:xfrm>
           <a:prstGeom prst="rect">
             <a:avLst/>
@@ -34067,7 +34863,139 @@
                 <a:ea typeface="Trebuchet MS" pitchFamily="34" charset="-122"/>
                 <a:cs typeface="Trebuchet MS" pitchFamily="34" charset="-120"/>
               </a:rPr>
-              <a:t>ly</a:t>
+              <a:t>n</a:t>
+            </a:r>
+            <a:endParaRPr lang="en-US" sz="900" dirty="0"/>
+          </a:p>
+        </p:txBody>
+      </p:sp>
+      <p:sp>
+        <p:nvSpPr>
+          <p:cNvPr id="60" name="Shape 58"/>
+          <p:cNvSpPr/>
+          <p:nvPr/>
+        </p:nvSpPr>
+        <p:spPr>
+          <a:xfrm>
+            <a:off x="7033565" y="4169664"/>
+            <a:ext cx="676656" cy="384048"/>
+          </a:xfrm>
+          <a:prstGeom prst="rect">
+            <a:avLst>
+              <a:gd name="adj" fmla="val 9524"/>
+            </a:avLst>
+          </a:prstGeom>
+          <a:solidFill>
+            <a:srgbClr val="FFFFFF"/>
+          </a:solidFill>
+          <a:ln w="12700">
+            <a:solidFill>
+              <a:srgbClr val="DB2777"/>
+            </a:solidFill>
+            <a:prstDash val="solid"/>
+          </a:ln>
+        </p:spPr>
+      </p:sp>
+      <p:sp>
+        <p:nvSpPr>
+          <p:cNvPr id="61" name="Text 59"/>
+          <p:cNvSpPr/>
+          <p:nvPr/>
+        </p:nvSpPr>
+        <p:spPr>
+          <a:xfrm>
+            <a:off x="7033565" y="4169664"/>
+            <a:ext cx="676656" cy="384048"/>
+          </a:xfrm>
+          <a:prstGeom prst="rect">
+            <a:avLst/>
+          </a:prstGeom>
+          <a:noFill/>
+          <a:ln/>
+        </p:spPr>
+        <p:txBody>
+          <a:bodyPr wrap="square" lIns="0" tIns="0" rIns="0" bIns="0" rtlCol="0" anchor="ctr"/>
+          <a:lstStyle/>
+          <a:p>
+            <a:pPr algn="ctr" indent="0" marL="0">
+              <a:buNone/>
+            </a:pPr>
+            <a:r>
+              <a:rPr lang="en-US" sz="900" b="1" dirty="0">
+                <a:solidFill>
+                  <a:srgbClr val="9D174D"/>
+                </a:solidFill>
+                <a:latin typeface="Trebuchet MS" pitchFamily="34" charset="0"/>
+                <a:ea typeface="Trebuchet MS" pitchFamily="34" charset="-122"/>
+                <a:cs typeface="Trebuchet MS" pitchFamily="34" charset="-120"/>
+              </a:rPr>
+              <a:t>e</a:t>
+            </a:r>
+            <a:endParaRPr lang="en-US" sz="900" dirty="0"/>
+          </a:p>
+        </p:txBody>
+      </p:sp>
+      <p:sp>
+        <p:nvSpPr>
+          <p:cNvPr id="62" name="Shape 60"/>
+          <p:cNvSpPr/>
+          <p:nvPr/>
+        </p:nvSpPr>
+        <p:spPr>
+          <a:xfrm>
+            <a:off x="7759598" y="4169664"/>
+            <a:ext cx="676656" cy="384048"/>
+          </a:xfrm>
+          <a:prstGeom prst="rect">
+            <a:avLst>
+              <a:gd name="adj" fmla="val 9524"/>
+            </a:avLst>
+          </a:prstGeom>
+          <a:solidFill>
+            <a:srgbClr val="FFFFFF"/>
+          </a:solidFill>
+          <a:ln w="12700">
+            <a:solidFill>
+              <a:srgbClr val="DB2777"/>
+            </a:solidFill>
+            <a:prstDash val="solid"/>
+          </a:ln>
+        </p:spPr>
+      </p:sp>
+      <p:sp>
+        <p:nvSpPr>
+          <p:cNvPr id="63" name="Text 61"/>
+          <p:cNvSpPr/>
+          <p:nvPr/>
+        </p:nvSpPr>
+        <p:spPr>
+          <a:xfrm>
+            <a:off x="7759598" y="4169664"/>
+            <a:ext cx="676656" cy="384048"/>
+          </a:xfrm>
+          <a:prstGeom prst="rect">
+            <a:avLst/>
+          </a:prstGeom>
+          <a:noFill/>
+          <a:ln/>
+        </p:spPr>
+        <p:txBody>
+          <a:bodyPr wrap="square" lIns="0" tIns="0" rIns="0" bIns="0" rtlCol="0" anchor="ctr"/>
+          <a:lstStyle/>
+          <a:p>
+            <a:pPr algn="ctr" indent="0" marL="0">
+              <a:buNone/>
+            </a:pPr>
+            <a:r>
+              <a:rPr lang="en-US" sz="900" b="1" dirty="0">
+                <a:solidFill>
+                  <a:srgbClr val="9D174D"/>
+                </a:solidFill>
+                <a:latin typeface="Trebuchet MS" pitchFamily="34" charset="0"/>
+                <a:ea typeface="Trebuchet MS" pitchFamily="34" charset="-122"/>
+                <a:cs typeface="Trebuchet MS" pitchFamily="34" charset="-120"/>
+              </a:rPr>
+              <a:t>ss</a:t>
             </a:r>
             <a:endParaRPr lang="en-US" sz="900" dirty="0"/>
           </a:p>
@@ -35957,7 +36885,7 @@
                 <a:ea typeface="Trebuchet MS" pitchFamily="34" charset="-122"/>
                 <a:cs typeface="Trebuchet MS" pitchFamily="34" charset="-120"/>
               </a:rPr>
-              <a:t>--ly</a:t>
+              <a:t>-ly</a:t>
             </a:r>
             <a:endParaRPr lang="en-US" sz="1300" dirty="0"/>
           </a:p>
@@ -36110,7 +37038,7 @@
                 <a:ea typeface="Trebuchet MS" pitchFamily="34" charset="-122"/>
                 <a:cs typeface="Trebuchet MS" pitchFamily="34" charset="-120"/>
               </a:rPr>
-              <a:t>--ity</a:t>
+              <a:t>-ness</a:t>
             </a:r>
             <a:endParaRPr lang="en-US" sz="1300" dirty="0"/>
           </a:p>
@@ -36174,7 +37102,7 @@
                 <a:ea typeface="Trebuchet MS" pitchFamily="34" charset="-122"/>
                 <a:cs typeface="Trebuchet MS" pitchFamily="34" charset="-120"/>
               </a:rPr>
-              <a:t>bi-</a:t>
+              <a:t>per-</a:t>
             </a:r>
             <a:endParaRPr lang="en-US" sz="1300" dirty="0"/>
           </a:p>
@@ -36263,7 +37191,7 @@
                 <a:ea typeface="Trebuchet MS" pitchFamily="34" charset="-122"/>
                 <a:cs typeface="Trebuchet MS" pitchFamily="34" charset="-120"/>
               </a:rPr>
-              <a:t>--ness</a:t>
+              <a:t>-ity</a:t>
             </a:r>
             <a:endParaRPr lang="en-US" sz="1300" dirty="0"/>
           </a:p>
@@ -36327,7 +37255,7 @@
                 <a:ea typeface="Trebuchet MS" pitchFamily="34" charset="-122"/>
                 <a:cs typeface="Trebuchet MS" pitchFamily="34" charset="-120"/>
               </a:rPr>
-              <a:t>dis-</a:t>
+              <a:t>re-</a:t>
             </a:r>
             <a:endParaRPr lang="en-US" sz="1300" dirty="0"/>
           </a:p>
@@ -36416,7 +37344,7 @@
                 <a:ea typeface="Trebuchet MS" pitchFamily="34" charset="-122"/>
                 <a:cs typeface="Trebuchet MS" pitchFamily="34" charset="-120"/>
               </a:rPr>
-              <a:t>--al</a:t>
+              <a:t>-al</a:t>
             </a:r>
             <a:endParaRPr lang="en-US" sz="1300" dirty="0"/>
           </a:p>
@@ -36480,7 +37408,7 @@
                 <a:ea typeface="Trebuchet MS" pitchFamily="34" charset="-122"/>
                 <a:cs typeface="Trebuchet MS" pitchFamily="34" charset="-120"/>
               </a:rPr>
-              <a:t>mis-</a:t>
+              <a:t>dis-</a:t>
             </a:r>
             <a:endParaRPr lang="en-US" sz="1300" dirty="0"/>
           </a:p>
@@ -36569,7 +37497,7 @@
                 <a:ea typeface="Trebuchet MS" pitchFamily="34" charset="-122"/>
                 <a:cs typeface="Trebuchet MS" pitchFamily="34" charset="-120"/>
               </a:rPr>
-              <a:t>--ise</a:t>
+              <a:t>-ism</a:t>
             </a:r>
             <a:endParaRPr lang="en-US" sz="1300" dirty="0"/>
           </a:p>
@@ -37070,7 +37998,7 @@
                 <a:ea typeface="Trebuchet MS" pitchFamily="34" charset="-122"/>
                 <a:cs typeface="Trebuchet MS" pitchFamily="34" charset="-120"/>
               </a:rPr>
-              <a:t>casualness</a:t>
+              <a:t>as usual</a:t>
             </a:r>
             <a:endParaRPr lang="en-US" sz="1200" dirty="0"/>
           </a:p>
@@ -37136,7 +38064,7 @@
                 <a:ea typeface="Trebuchet MS" pitchFamily="34" charset="-122"/>
                 <a:cs typeface="Trebuchet MS" pitchFamily="34" charset="-120"/>
               </a:rPr>
-              <a:t>visually</a:t>
+              <a:t>unusual</a:t>
             </a:r>
             <a:endParaRPr lang="en-US" sz="1200" dirty="0"/>
           </a:p>
@@ -38324,7 +39252,7 @@
                 <a:ea typeface="Calibri" pitchFamily="34" charset="-122"/>
                 <a:cs typeface="Calibri" pitchFamily="34" charset="-120"/>
               </a:rPr>
-              <a:t>1.  The word 'usual' comes from a Latin word meaning customary or ordinary.</a:t>
+              <a:t>1.  Adding '-ly' to 'usual' makes the word 'usually', which means in a normal way.</a:t>
             </a:r>
             <a:endParaRPr lang="en-US" sz="1300" dirty="0"/>
           </a:p>
@@ -38463,7 +39391,7 @@
                 <a:ea typeface="Calibri" pitchFamily="34" charset="-122"/>
                 <a:cs typeface="Calibri" pitchFamily="34" charset="-120"/>
               </a:rPr>
-              <a:t>2.  Adding 'un-' to 'usual' makes the word mean more than usual.</a:t>
+              <a:t>2.  The root 'usual' means something that is rare and hard to find.</a:t>
             </a:r>
             <a:endParaRPr lang="en-US" sz="1300" dirty="0"/>
           </a:p>
@@ -38602,7 +39530,7 @@
                 <a:ea typeface="Calibri" pitchFamily="34" charset="-122"/>
                 <a:cs typeface="Calibri" pitchFamily="34" charset="-120"/>
               </a:rPr>
-              <a:t>3.  The word 'usually' contains the root 'usual' plus the suffix '-ly'.</a:t>
+              <a:t>3.  The root 'usual' comes from ancient Greek.</a:t>
             </a:r>
             <a:endParaRPr lang="en-US" sz="1300" dirty="0"/>
           </a:p>
@@ -38625,11 +39553,11 @@
             </a:avLst>
           </a:prstGeom>
           <a:solidFill>
-            <a:srgbClr val="DCFCE7"/>
-          </a:solidFill>
-          <a:ln w="12700">
-            <a:solidFill>
-              <a:srgbClr val="16A34A"/>
+            <a:srgbClr val="FEE2E2"/>
+          </a:solidFill>
+          <a:ln w="12700">
+            <a:solidFill>
+              <a:srgbClr val="DC2626"/>
             </a:solidFill>
             <a:prstDash val="solid"/>
           </a:ln>
@@ -38662,13 +39590,13 @@
             <a:r>
               <a:rPr lang="en-US" sz="1100" b="1" dirty="0">
                 <a:solidFill>
-                  <a:srgbClr val="16A34A"/>
+                  <a:srgbClr val="DC2626"/>
                 </a:solidFill>
                 <a:latin typeface="Trebuchet MS" pitchFamily="34" charset="0"/>
                 <a:ea typeface="Trebuchet MS" pitchFamily="34" charset="-122"/>
                 <a:cs typeface="Trebuchet MS" pitchFamily="34" charset="-120"/>
               </a:rPr>
-              <a:t>TRUE</a:t>
+              <a:t>FALSE</a:t>
             </a:r>
             <a:endParaRPr lang="en-US" sz="1100" dirty="0"/>
           </a:p>
@@ -38741,7 +39669,7 @@
                 <a:ea typeface="Calibri" pitchFamily="34" charset="-122"/>
                 <a:cs typeface="Calibri" pitchFamily="34" charset="-120"/>
               </a:rPr>
-              <a:t>4.  The suffix '-ly' can be added to 'usual' to describe how something is done.</a:t>
+              <a:t>4.  The word 'unusually' contains both a prefix and a suffix added to the root 'usual'.</a:t>
             </a:r>
             <a:endParaRPr lang="en-US" sz="1300" dirty="0"/>
           </a:p>
@@ -38880,7 +39808,7 @@
                 <a:ea typeface="Calibri" pitchFamily="34" charset="-122"/>
                 <a:cs typeface="Calibri" pitchFamily="34" charset="-120"/>
               </a:rPr>
-              <a:t>5.  The word 'unusual' means exactly the same as 'usual'.</a:t>
+              <a:t>5.  The word 'unusual' is made by adding the prefix 'un-' to the root 'usual'.</a:t>
             </a:r>
             <a:endParaRPr lang="en-US" sz="1300" dirty="0"/>
           </a:p>
@@ -38903,11 +39831,11 @@
             </a:avLst>
           </a:prstGeom>
           <a:solidFill>
-            <a:srgbClr val="FEE2E2"/>
-          </a:solidFill>
-          <a:ln w="12700">
-            <a:solidFill>
-              <a:srgbClr val="DC2626"/>
+            <a:srgbClr val="DCFCE7"/>
+          </a:solidFill>
+          <a:ln w="12700">
+            <a:solidFill>
+              <a:srgbClr val="16A34A"/>
             </a:solidFill>
             <a:prstDash val="solid"/>
           </a:ln>
@@ -38940,13 +39868,13 @@
             <a:r>
               <a:rPr lang="en-US" sz="1100" b="1" dirty="0">
                 <a:solidFill>
-                  <a:srgbClr val="DC2626"/>
+                  <a:srgbClr val="16A34A"/>
                 </a:solidFill>
                 <a:latin typeface="Trebuchet MS" pitchFamily="34" charset="0"/>
                 <a:ea typeface="Trebuchet MS" pitchFamily="34" charset="-122"/>
                 <a:cs typeface="Trebuchet MS" pitchFamily="34" charset="-120"/>
               </a:rPr>
-              <a:t>FALSE</a:t>
+              <a:t>TRUE</a:t>
             </a:r>
             <a:endParaRPr lang="en-US" sz="1100" dirty="0"/>
           </a:p>
@@ -39915,7 +40843,7 @@
                 <a:ea typeface="Trebuchet MS" pitchFamily="34" charset="-122"/>
                 <a:cs typeface="Trebuchet MS" pitchFamily="34" charset="-120"/>
               </a:rPr>
-              <a:t>casualness</a:t>
+              <a:t>as usual</a:t>
             </a:r>
             <a:endParaRPr lang="en-US" sz="1300" dirty="0"/>
           </a:p>
@@ -40636,7 +41564,7 @@
                 <a:ea typeface="Trebuchet MS" pitchFamily="34" charset="-122"/>
                 <a:cs typeface="Trebuchet MS" pitchFamily="34" charset="-120"/>
               </a:rPr>
-              <a:t>--ly</a:t>
+              <a:t>-ly</a:t>
             </a:r>
             <a:endParaRPr lang="en-US" sz="1300" dirty="0"/>
           </a:p>
@@ -40789,7 +41717,7 @@
                 <a:ea typeface="Trebuchet MS" pitchFamily="34" charset="-122"/>
                 <a:cs typeface="Trebuchet MS" pitchFamily="34" charset="-120"/>
               </a:rPr>
-              <a:t>--ity</a:t>
+              <a:t>-ness</a:t>
             </a:r>
             <a:endParaRPr lang="en-US" sz="1300" dirty="0"/>
           </a:p>
@@ -40853,7 +41781,7 @@
                 <a:ea typeface="Trebuchet MS" pitchFamily="34" charset="-122"/>
                 <a:cs typeface="Trebuchet MS" pitchFamily="34" charset="-120"/>
               </a:rPr>
-              <a:t>bi-</a:t>
+              <a:t>per-</a:t>
             </a:r>
             <a:endParaRPr lang="en-US" sz="1300" dirty="0"/>
           </a:p>
@@ -40942,7 +41870,7 @@
                 <a:ea typeface="Trebuchet MS" pitchFamily="34" charset="-122"/>
                 <a:cs typeface="Trebuchet MS" pitchFamily="34" charset="-120"/>
               </a:rPr>
-              <a:t>--ness</a:t>
+              <a:t>-ity</a:t>
             </a:r>
             <a:endParaRPr lang="en-US" sz="1300" dirty="0"/>
           </a:p>
@@ -41006,7 +41934,7 @@
                 <a:ea typeface="Trebuchet MS" pitchFamily="34" charset="-122"/>
                 <a:cs typeface="Trebuchet MS" pitchFamily="34" charset="-120"/>
               </a:rPr>
-              <a:t>dis-</a:t>
+              <a:t>re-</a:t>
             </a:r>
             <a:endParaRPr lang="en-US" sz="1300" dirty="0"/>
           </a:p>
@@ -41095,7 +42023,7 @@
                 <a:ea typeface="Trebuchet MS" pitchFamily="34" charset="-122"/>
                 <a:cs typeface="Trebuchet MS" pitchFamily="34" charset="-120"/>
               </a:rPr>
-              <a:t>--al</a:t>
+              <a:t>-al</a:t>
             </a:r>
             <a:endParaRPr lang="en-US" sz="1300" dirty="0"/>
           </a:p>
@@ -41159,7 +42087,7 @@
                 <a:ea typeface="Trebuchet MS" pitchFamily="34" charset="-122"/>
                 <a:cs typeface="Trebuchet MS" pitchFamily="34" charset="-120"/>
               </a:rPr>
-              <a:t>mis-</a:t>
+              <a:t>dis-</a:t>
             </a:r>
             <a:endParaRPr lang="en-US" sz="1300" dirty="0"/>
           </a:p>
@@ -41248,7 +42176,7 @@
                 <a:ea typeface="Trebuchet MS" pitchFamily="34" charset="-122"/>
                 <a:cs typeface="Trebuchet MS" pitchFamily="34" charset="-120"/>
               </a:rPr>
-              <a:t>--ise</a:t>
+              <a:t>-ism</a:t>
             </a:r>
             <a:endParaRPr lang="en-US" sz="1300" dirty="0"/>
           </a:p>
@@ -41526,7 +42454,7 @@
         <p:spPr>
           <a:xfrm>
             <a:off x="4471416" y="4178808"/>
-            <a:ext cx="950976" cy="420624"/>
+            <a:ext cx="822960" cy="420624"/>
           </a:xfrm>
           <a:prstGeom prst="rect">
             <a:avLst>
@@ -41560,7 +42488,7 @@
         <p:spPr>
           <a:xfrm>
             <a:off x="4471416" y="4178808"/>
-            <a:ext cx="950976" cy="420624"/>
+            <a:ext cx="822960" cy="420624"/>
           </a:xfrm>
           <a:prstGeom prst="rect">
             <a:avLst/>
@@ -41584,7 +42512,7 @@
                 <a:ea typeface="Trebuchet MS" pitchFamily="34" charset="-122"/>
                 <a:cs typeface="Trebuchet MS" pitchFamily="34" charset="-120"/>
               </a:rPr>
-              <a:t>--ly</a:t>
+              <a:t>-ly</a:t>
             </a:r>
             <a:endParaRPr lang="en-US" sz="1300" dirty="0"/>
           </a:p>
@@ -41598,7 +42526,7 @@
         </p:nvSpPr>
         <p:spPr>
           <a:xfrm>
-            <a:off x="5495544" y="4178808"/>
+            <a:off x="5367528" y="4178808"/>
             <a:ext cx="365760" cy="420624"/>
           </a:xfrm>
           <a:prstGeom prst="rect">
@@ -41637,7 +42565,7 @@
         </p:nvSpPr>
         <p:spPr>
           <a:xfrm>
-            <a:off x="5907024" y="4178808"/>
+            <a:off x="5779008" y="4178808"/>
             <a:ext cx="2194560" cy="420624"/>
           </a:xfrm>
           <a:prstGeom prst="rect">
@@ -41664,7 +42592,7 @@
         </p:nvSpPr>
         <p:spPr>
           <a:xfrm>
-            <a:off x="5907024" y="4178808"/>
+            <a:off x="5779008" y="4178808"/>
             <a:ext cx="2194560" cy="420624"/>
           </a:xfrm>
           <a:prstGeom prst="rect">
@@ -42159,7 +43087,7 @@
                 <a:ea typeface="Calibri" pitchFamily="34" charset="-122"/>
                 <a:cs typeface="Calibri" pitchFamily="34" charset="-120"/>
               </a:rPr>
-              <a:t>The quality of being different or not normal.</a:t>
+              <a:t>The quality of being different or strange compared to what is normal.</a:t>
             </a:r>
             <a:endParaRPr lang="en-US" sz="1200" dirty="0"/>
           </a:p>
@@ -42298,7 +43226,7 @@
                 <a:ea typeface="Calibri" pitchFamily="34" charset="-122"/>
                 <a:cs typeface="Calibri" pitchFamily="34" charset="-120"/>
               </a:rPr>
-              <a:t>Something that happens normally or most of the time.</a:t>
+              <a:t>Something that happens normally or most of the time, like your usual breakfast.</a:t>
             </a:r>
             <a:endParaRPr lang="en-US" sz="1200" dirty="0"/>
           </a:p>
@@ -42437,7 +43365,7 @@
                 <a:ea typeface="Calibri" pitchFamily="34" charset="-122"/>
                 <a:cs typeface="Calibri" pitchFamily="34" charset="-120"/>
               </a:rPr>
-              <a:t>In a way that is different from normal; more than usual.</a:t>
+              <a:t>In a way that is different from normal, like 'It was unusually cold today.'</a:t>
             </a:r>
             <a:endParaRPr lang="en-US" sz="1200" dirty="0"/>
           </a:p>
@@ -42576,7 +43504,7 @@
                 <a:ea typeface="Calibri" pitchFamily="34" charset="-122"/>
                 <a:cs typeface="Calibri" pitchFamily="34" charset="-120"/>
               </a:rPr>
-              <a:t>Done in a way that stands out because it is not ordinary.</a:t>
+              <a:t>Done in a way that stands out because it is not ordinary or expected.</a:t>
             </a:r>
             <a:endParaRPr lang="en-US" sz="1200" dirty="0"/>
           </a:p>
@@ -42715,7 +43643,7 @@
                 <a:ea typeface="Calibri" pitchFamily="34" charset="-122"/>
                 <a:cs typeface="Calibri" pitchFamily="34" charset="-120"/>
               </a:rPr>
-              <a:t>A relaxed, easygoing manner that feels normal and comfortable.</a:t>
+              <a:t>In the same way as always, like things are going on as usual at school.</a:t>
             </a:r>
             <a:endParaRPr lang="en-US" sz="1200" dirty="0"/>
           </a:p>
@@ -42854,7 +43782,7 @@
                 <a:ea typeface="Calibri" pitchFamily="34" charset="-122"/>
                 <a:cs typeface="Calibri" pitchFamily="34" charset="-120"/>
               </a:rPr>
-              <a:t>The way something happens most of the time; normally.</a:t>
+              <a:t>What happens most of the time, like 'I usually wake up at seven.'</a:t>
             </a:r>
             <a:endParaRPr lang="en-US" sz="1200" dirty="0"/>
           </a:p>
@@ -42927,7 +43855,7 @@
                 <a:ea typeface="Trebuchet MS" pitchFamily="34" charset="-122"/>
                 <a:cs typeface="Trebuchet MS" pitchFamily="34" charset="-120"/>
               </a:rPr>
-              <a:t>casualness</a:t>
+              <a:t>as usual</a:t>
             </a:r>
             <a:endParaRPr lang="en-US" sz="1200" dirty="0"/>
           </a:p>
@@ -42993,7 +43921,7 @@
                 <a:ea typeface="Calibri" pitchFamily="34" charset="-122"/>
                 <a:cs typeface="Calibri" pitchFamily="34" charset="-120"/>
               </a:rPr>
-              <a:t>Something that is different from what normally happens; not ordinary.</a:t>
+              <a:t>Something that is different from what normally happens — not what you would expect.</a:t>
             </a:r>
             <a:endParaRPr lang="en-US" sz="1200" dirty="0"/>
           </a:p>
@@ -43488,7 +44416,7 @@
                 <a:ea typeface="Calibri" pitchFamily="34" charset="-122"/>
                 <a:cs typeface="Calibri" pitchFamily="34" charset="-120"/>
               </a:rPr>
-              <a:t>It is unusual to see snow falling in Sydney during summer.</a:t>
+              <a:t>It was unusual to see snow falling in the middle of summer.</a:t>
             </a:r>
             <a:endParaRPr lang="en-US" sz="1500" dirty="0"/>
           </a:p>
@@ -43652,7 +44580,7 @@
                 <a:ea typeface="Calibri" pitchFamily="34" charset="-122"/>
                 <a:cs typeface="Calibri" pitchFamily="34" charset="-120"/>
               </a:rPr>
-              <a:t>She usually finishes her homework before dinner each night.</a:t>
+              <a:t>She usually finishes her homework before dinner, but tonight she stayed up late.</a:t>
             </a:r>
             <a:endParaRPr lang="en-US" sz="1500" dirty="0"/>
           </a:p>
@@ -43816,7 +44744,7 @@
                 <a:ea typeface="Calibri" pitchFamily="34" charset="-122"/>
                 <a:cs typeface="Calibri" pitchFamily="34" charset="-120"/>
               </a:rPr>
-              <a:t>The magician performed an unusually clever trick that amazed the whole audience.</a:t>
+              <a:t>The teacher noticed that the classroom was unusually quiet when she walked in.</a:t>
             </a:r>
             <a:endParaRPr lang="en-US" sz="1500" dirty="0"/>
           </a:p>
